--- a/GPR_장표.pptx
+++ b/GPR_장표.pptx
@@ -6,9 +6,10 @@
   </p:sldMasterIdLst>
   <p:sldIdLst>
     <p:sldId id="256" r:id="rId2"/>
+    <p:sldId id="257" r:id="rId3"/>
   </p:sldIdLst>
   <p:notesMasterIdLst>
-    <p:notesMasterId r:id="rId3"/>
+    <p:notesMasterId r:id="rId4"/>
   </p:notesMasterIdLst>
   <p:sldSz cx="12192000" cy="6858000"/>
   <p:notesSz cx="6858000" cy="12192000"/>
@@ -526,6 +527,94 @@
             <a:fld id="{F7021451-1387-4CA6-816F-3879F97B5CBC}" type="slidenum">
               <a:rPr lang="en-US"/>
               <a:t>1</a:t>
+            </a:fld>
+            <a:endParaRPr lang="en-US"/>
+          </a:p>
+        </p:txBody>
+      </p:sp>
+    </p:spTree>
+    <p:extLst>
+      <p:ext uri="{BB962C8B-B14F-4D97-AF65-F5344CB8AC3E}">
+        <p14:creationId xmlns:p14="http://schemas.microsoft.com/office/powerpoint/2010/main" val="1024086991"/>
+      </p:ext>
+    </p:extLst>
+  </p:cSld>
+  <p:clrMapOvr>
+    <a:masterClrMapping/>
+  </p:clrMapOvr>
+</p:notes>
+</file>
+
+<file path=ppt/notesSlides/notesSlide2.xml><?xml version="1.0" encoding="utf-8"?>
+<p:notes xmlns:a="http://schemas.openxmlformats.org/drawingml/2006/main" xmlns:r="http://schemas.openxmlformats.org/officeDocument/2006/relationships" xmlns:p="http://schemas.openxmlformats.org/presentationml/2006/main">
+  <p:cSld>
+    <p:spTree>
+      <p:nvGrpSpPr>
+        <p:cNvPr id="1" name=""/>
+        <p:cNvGrpSpPr/>
+        <p:nvPr/>
+      </p:nvGrpSpPr>
+      <p:grpSpPr>
+        <a:xfrm>
+          <a:off x="0" y="0"/>
+          <a:ext cx="0" cy="0"/>
+          <a:chOff x="0" y="0"/>
+          <a:chExt cx="0" cy="0"/>
+        </a:xfrm>
+      </p:grpSpPr>
+      <p:sp>
+        <p:nvSpPr>
+          <p:cNvPr id="2" name="Slide Image Placeholder 1"/>
+          <p:cNvSpPr>
+            <a:spLocks noGrp="1" noRot="1" noChangeAspect="1"/>
+          </p:cNvSpPr>
+          <p:nvPr>
+            <p:ph type="sldImg"/>
+          </p:nvPr>
+        </p:nvSpPr>
+        <p:spPr/>
+      </p:sp>
+      <p:sp>
+        <p:nvSpPr>
+          <p:cNvPr id="3" name="Notes Placeholder 2"/>
+          <p:cNvSpPr>
+            <a:spLocks noGrp="1"/>
+          </p:cNvSpPr>
+          <p:nvPr>
+            <p:ph type="body" idx="1"/>
+          </p:nvPr>
+        </p:nvSpPr>
+        <p:spPr/>
+        <p:txBody>
+          <a:bodyPr/>
+          <a:lstStyle/>
+          <a:p>
+            <a:r>
+              <a:rPr lang="en-US" dirty="0"/>
+              <a:t/>
+            </a:r>
+            <a:endParaRPr lang="en-US" dirty="0"/>
+          </a:p>
+        </p:txBody>
+      </p:sp>
+      <p:sp>
+        <p:nvSpPr>
+          <p:cNvPr id="4" name="Slide Number Placeholder 3"/>
+          <p:cNvSpPr>
+            <a:spLocks noGrp="1"/>
+          </p:cNvSpPr>
+          <p:nvPr>
+            <p:ph type="sldNum" sz="quarter" idx="10"/>
+          </p:nvPr>
+        </p:nvSpPr>
+        <p:spPr/>
+        <p:txBody>
+          <a:bodyPr/>
+          <a:lstStyle/>
+          <a:p>
+            <a:fld id="{F7021451-1387-4CA6-816F-3879F97B5CBC}" type="slidenum">
+              <a:rPr lang="en-US"/>
+              <a:t>2</a:t>
             </a:fld>
             <a:endParaRPr lang="en-US"/>
           </a:p>
@@ -2315,7 +2404,7 @@
                 <a:ea typeface="Malgun Gothic" pitchFamily="34" charset="-122"/>
                 <a:cs typeface="Malgun Gothic" pitchFamily="34" charset="-120"/>
               </a:rPr>
-              <a:t>예측  —  평균과 불확실성</a:t>
+              <a:t>쉽게 보면  —  예측 = 주변 해석 결과의 가중평균</a:t>
             </a:r>
             <a:endParaRPr lang="en-US" sz="1050" dirty="0"/>
           </a:p>
@@ -2323,7 +2412,7 @@
       </p:sp>
       <p:pic>
         <p:nvPicPr>
-          <p:cNvPr id="25" name="Image 0" descr="/home/user/dddd/식/eq3a.png">    </p:cNvPr>
+          <p:cNvPr id="25" name="Image 0" descr="/home/user/dddd/식/eqA.png">    </p:cNvPr>
           <p:cNvPicPr>
             <a:picLocks noChangeAspect="1"/>
           </p:cNvPicPr>
@@ -2337,52 +2426,28 @@
         </p:blipFill>
         <p:spPr>
           <a:xfrm>
-            <a:off x="905256" y="4553712"/>
-            <a:ext cx="2007718" cy="290170"/>
+            <a:off x="950976" y="4535424"/>
+            <a:ext cx="1691945" cy="537667"/>
           </a:xfrm>
           <a:prstGeom prst="rect">
             <a:avLst/>
           </a:prstGeom>
         </p:spPr>
       </p:pic>
-      <p:pic>
-        <p:nvPicPr>
-          <p:cNvPr id="26" name="Image 1" descr="/home/user/dddd/식/eq3b.png">    </p:cNvPr>
-          <p:cNvPicPr>
-            <a:picLocks noChangeAspect="1"/>
-          </p:cNvPicPr>
-          <p:nvPr/>
-        </p:nvPicPr>
-        <p:blipFill>
-          <a:blip r:embed="rId2"/>
-          <a:stretch>
-            <a:fillRect/>
-          </a:stretch>
-        </p:blipFill>
-        <p:spPr>
-          <a:xfrm>
-            <a:off x="905256" y="4898746"/>
-            <a:ext cx="3193999" cy="290170"/>
-          </a:xfrm>
-          <a:prstGeom prst="rect">
-            <a:avLst/>
-          </a:prstGeom>
-        </p:spPr>
-      </p:pic>
-      <p:sp>
-        <p:nvSpPr>
-          <p:cNvPr id="27" name="Shape 23"/>
+      <p:sp>
+        <p:nvSpPr>
+          <p:cNvPr id="26" name="Shape 23"/>
           <p:cNvSpPr/>
           <p:nvPr/>
         </p:nvSpPr>
         <p:spPr>
           <a:xfrm>
-            <a:off x="813816" y="5413248"/>
-            <a:ext cx="4846320" cy="713232"/>
+            <a:off x="813816" y="5175504"/>
+            <a:ext cx="4846320" cy="914400"/>
           </a:xfrm>
           <a:prstGeom prst="roundRect">
             <a:avLst>
-              <a:gd name="adj" fmla="val 7692"/>
+              <a:gd name="adj" fmla="val 6000"/>
             </a:avLst>
           </a:prstGeom>
           <a:solidFill>
@@ -2398,14 +2463,14 @@
       </p:sp>
       <p:sp>
         <p:nvSpPr>
-          <p:cNvPr id="28" name="Text 24"/>
+          <p:cNvPr id="27" name="Text 24"/>
           <p:cNvSpPr txBox="1"/>
           <p:nvPr/>
         </p:nvSpPr>
         <p:spPr>
           <a:xfrm>
-            <a:off x="960120" y="5413248"/>
-            <a:ext cx="4572000" cy="713232"/>
+            <a:off x="960120" y="5175504"/>
+            <a:ext cx="4572000" cy="914400"/>
           </a:xfrm>
           <a:prstGeom prst="rect">
             <a:avLst/>
@@ -2424,7 +2489,7 @@
               <a:buNone/>
             </a:pPr>
             <a:r>
-              <a:rPr lang="en-US" sz="900" dirty="0">
+              <a:rPr lang="en-US" sz="920" dirty="0">
                 <a:solidFill>
                   <a:srgbClr val="16305B"/>
                 </a:solidFill>
@@ -2432,9 +2497,9 @@
                 <a:ea typeface="Malgun Gothic" pitchFamily="34" charset="-122"/>
                 <a:cs typeface="Malgun Gothic" pitchFamily="34" charset="-120"/>
               </a:rPr>
-              <a:t>μ : 해석한 80점 결과의 가중평균 (가까운 점일수록 큰 가중치)</a:t>
+              <a:t>w_i : 가까운 해석점일수록 큰 가중치</a:t>
             </a:r>
-            <a:endParaRPr lang="en-US" sz="900" dirty="0"/>
+            <a:endParaRPr lang="en-US" sz="920" dirty="0"/>
           </a:p>
           <a:p>
             <a:pPr indent="0" marL="0">
@@ -2444,7 +2509,7 @@
               <a:buNone/>
             </a:pPr>
             <a:r>
-              <a:rPr lang="en-US" sz="900" dirty="0">
+              <a:rPr lang="en-US" sz="920" dirty="0">
                 <a:solidFill>
                   <a:srgbClr val="16305B"/>
                 </a:solidFill>
@@ -2452,15 +2517,35 @@
                 <a:ea typeface="Malgun Gothic" pitchFamily="34" charset="-122"/>
                 <a:cs typeface="Malgun Gothic" pitchFamily="34" charset="-120"/>
               </a:rPr>
-              <a:t>σ² : 해석점에서 멀수록 커짐 → 그림의 파란 띠 (±2σ)</a:t>
+              <a:t>불확실성 σ : 해석점에서 멀수록 커짐 → 그림의 파란 띠</a:t>
             </a:r>
-            <a:endParaRPr lang="en-US" sz="900" dirty="0"/>
+            <a:endParaRPr lang="en-US" sz="920" dirty="0"/>
+          </a:p>
+          <a:p>
+            <a:pPr indent="0" marL="0">
+              <a:lnSpc>
+                <a:spcPct val="130000"/>
+              </a:lnSpc>
+              <a:buNone/>
+            </a:pPr>
+            <a:r>
+              <a:rPr lang="en-US" sz="920" dirty="0">
+                <a:solidFill>
+                  <a:srgbClr val="6B7A8F"/>
+                </a:solidFill>
+                <a:latin typeface="Malgun Gothic" pitchFamily="34" charset="0"/>
+                <a:ea typeface="Malgun Gothic" pitchFamily="34" charset="-122"/>
+                <a:cs typeface="Malgun Gothic" pitchFamily="34" charset="-120"/>
+              </a:rPr>
+              <a:t>가중치 · 불확실성은 커널로 계산 (전체 식은 부록)</a:t>
+            </a:r>
+            <a:endParaRPr lang="en-US" sz="920" dirty="0"/>
           </a:p>
         </p:txBody>
       </p:sp>
       <p:sp>
         <p:nvSpPr>
-          <p:cNvPr id="29" name="Shape 25"/>
+          <p:cNvPr id="28" name="Shape 25"/>
           <p:cNvSpPr/>
           <p:nvPr/>
         </p:nvSpPr>
@@ -2494,7 +2579,7 @@
       </p:sp>
       <p:sp>
         <p:nvSpPr>
-          <p:cNvPr id="30" name="Shape 26"/>
+          <p:cNvPr id="29" name="Shape 26"/>
           <p:cNvSpPr/>
           <p:nvPr/>
         </p:nvSpPr>
@@ -2519,7 +2604,7 @@
       </p:sp>
       <p:sp>
         <p:nvSpPr>
-          <p:cNvPr id="31" name="Text 27"/>
+          <p:cNvPr id="30" name="Text 27"/>
           <p:cNvSpPr txBox="1"/>
           <p:nvPr/>
         </p:nvSpPr>
@@ -2550,7 +2635,7 @@
                 <a:ea typeface="Malgun Gothic" pitchFamily="34" charset="-122"/>
                 <a:cs typeface="Malgun Gothic" pitchFamily="34" charset="-120"/>
               </a:rPr>
-              <a:t>모델 구성</a:t>
+              <a:t>왜 GPR인가  —  본 과제에 적합한 이유</a:t>
             </a:r>
             <a:endParaRPr lang="en-US" sz="1300" dirty="0"/>
           </a:p>
@@ -2558,14 +2643,78 @@
       </p:sp>
       <p:sp>
         <p:nvSpPr>
-          <p:cNvPr id="32" name="Text 28"/>
+          <p:cNvPr id="31" name="Shape 28"/>
+          <p:cNvSpPr/>
+          <p:nvPr/>
+        </p:nvSpPr>
+        <p:spPr>
+          <a:xfrm>
+            <a:off x="6647688" y="1920240"/>
+            <a:ext cx="274320" cy="274320"/>
+          </a:xfrm>
+          <a:prstGeom prst="ellipse">
+            <a:avLst/>
+          </a:prstGeom>
+          <a:solidFill>
+            <a:srgbClr val="16305B"/>
+          </a:solidFill>
+          <a:ln w="12700">
+            <a:solidFill>
+              <a:srgbClr val="16305B"/>
+            </a:solidFill>
+            <a:prstDash val="solid"/>
+          </a:ln>
+        </p:spPr>
+      </p:sp>
+      <p:sp>
+        <p:nvSpPr>
+          <p:cNvPr id="32" name="Text 29"/>
           <p:cNvSpPr txBox="1"/>
           <p:nvPr/>
         </p:nvSpPr>
         <p:spPr>
           <a:xfrm>
-            <a:off x="6647688" y="1792224"/>
-            <a:ext cx="4846320" cy="237744"/>
+            <a:off x="6647688" y="1920240"/>
+            <a:ext cx="274320" cy="274320"/>
+          </a:xfrm>
+          <a:prstGeom prst="rect">
+            <a:avLst/>
+          </a:prstGeom>
+          <a:noFill/>
+          <a:ln/>
+        </p:spPr>
+        <p:txBody>
+          <a:bodyPr wrap="square" lIns="0" tIns="0" rIns="0" bIns="0" rtlCol="0" anchor="ctr"/>
+          <a:lstStyle/>
+          <a:p>
+            <a:pPr algn="ctr" indent="0" marL="0">
+              <a:buNone/>
+            </a:pPr>
+            <a:r>
+              <a:rPr lang="en-US" sz="950" b="1" dirty="0">
+                <a:solidFill>
+                  <a:srgbClr val="FFFFFF"/>
+                </a:solidFill>
+                <a:latin typeface="Malgun Gothic" pitchFamily="34" charset="0"/>
+                <a:ea typeface="Malgun Gothic" pitchFamily="34" charset="-122"/>
+                <a:cs typeface="Malgun Gothic" pitchFamily="34" charset="-120"/>
+              </a:rPr>
+              <a:t>1</a:t>
+            </a:r>
+            <a:endParaRPr lang="en-US" sz="950" dirty="0"/>
+          </a:p>
+        </p:txBody>
+      </p:sp>
+      <p:sp>
+        <p:nvSpPr>
+          <p:cNvPr id="33" name="Text 30"/>
+          <p:cNvSpPr txBox="1"/>
+          <p:nvPr/>
+        </p:nvSpPr>
+        <p:spPr>
+          <a:xfrm>
+            <a:off x="7031736" y="1828800"/>
+            <a:ext cx="4462272" cy="228600"/>
           </a:xfrm>
           <a:prstGeom prst="rect">
             <a:avLst/>
@@ -2589,46 +2738,22 @@
                 <a:ea typeface="Malgun Gothic" pitchFamily="34" charset="-122"/>
                 <a:cs typeface="Malgun Gothic" pitchFamily="34" charset="-120"/>
               </a:rPr>
-              <a:t>모델 가정</a:t>
+              <a:t>해석 비용이 큼</a:t>
             </a:r>
             <a:endParaRPr lang="en-US" sz="1050" dirty="0"/>
           </a:p>
         </p:txBody>
       </p:sp>
-      <p:pic>
-        <p:nvPicPr>
-          <p:cNvPr id="33" name="Image 2" descr="/home/user/dddd/식/eq1.png">    </p:cNvPr>
-          <p:cNvPicPr>
-            <a:picLocks noChangeAspect="1"/>
-          </p:cNvPicPr>
-          <p:nvPr/>
-        </p:nvPicPr>
-        <p:blipFill>
-          <a:blip r:embed="rId3"/>
-          <a:stretch>
-            <a:fillRect/>
-          </a:stretch>
-        </p:blipFill>
-        <p:spPr>
-          <a:xfrm>
-            <a:off x="6739128" y="2066544"/>
-            <a:ext cx="3885286" cy="256032"/>
-          </a:xfrm>
-          <a:prstGeom prst="rect">
-            <a:avLst/>
-          </a:prstGeom>
-        </p:spPr>
-      </p:pic>
-      <p:sp>
-        <p:nvSpPr>
-          <p:cNvPr id="34" name="Text 29"/>
+      <p:sp>
+        <p:nvSpPr>
+          <p:cNvPr id="34" name="Text 31"/>
           <p:cNvSpPr txBox="1"/>
           <p:nvPr/>
         </p:nvSpPr>
         <p:spPr>
           <a:xfrm>
-            <a:off x="6647688" y="2359152"/>
-            <a:ext cx="4846320" cy="237744"/>
+            <a:off x="7031736" y="2066544"/>
+            <a:ext cx="4462272" cy="228600"/>
           </a:xfrm>
           <a:prstGeom prst="rect">
             <a:avLst/>
@@ -2641,36 +2766,97 @@
           <a:lstStyle/>
           <a:p>
             <a:pPr indent="0" marL="0">
-              <a:lnSpc>
-                <a:spcPct val="115000"/>
-              </a:lnSpc>
               <a:buNone/>
             </a:pPr>
             <a:r>
-              <a:rPr lang="en-US" sz="880" dirty="0">
+              <a:rPr lang="en-US" sz="900" dirty="0">
                 <a:solidFill>
-                  <a:srgbClr val="6B7A8F"/>
+                  <a:srgbClr val="1C2733"/>
                 </a:solidFill>
                 <a:latin typeface="Malgun Gothic" pitchFamily="34" charset="0"/>
                 <a:ea typeface="Malgun Gothic" pitchFamily="34" charset="-122"/>
                 <a:cs typeface="Malgun Gothic" pitchFamily="34" charset="-120"/>
               </a:rPr>
-              <a:t>해석 결과 y = 매끄러운 함수 f + 작은 수치 오차 ε</a:t>
+              <a:t>해석 1회 약 17분 → 수천 회 탐색은 불가, 대리모델이 수 초 만에 예측</a:t>
             </a:r>
-            <a:endParaRPr lang="en-US" sz="880" dirty="0"/>
+            <a:endParaRPr lang="en-US" sz="900" dirty="0"/>
           </a:p>
         </p:txBody>
       </p:sp>
       <p:sp>
         <p:nvSpPr>
-          <p:cNvPr id="35" name="Text 30"/>
+          <p:cNvPr id="35" name="Shape 32"/>
+          <p:cNvSpPr/>
+          <p:nvPr/>
+        </p:nvSpPr>
+        <p:spPr>
+          <a:xfrm>
+            <a:off x="6647688" y="2468880"/>
+            <a:ext cx="274320" cy="274320"/>
+          </a:xfrm>
+          <a:prstGeom prst="ellipse">
+            <a:avLst/>
+          </a:prstGeom>
+          <a:solidFill>
+            <a:srgbClr val="16305B"/>
+          </a:solidFill>
+          <a:ln w="12700">
+            <a:solidFill>
+              <a:srgbClr val="16305B"/>
+            </a:solidFill>
+            <a:prstDash val="solid"/>
+          </a:ln>
+        </p:spPr>
+      </p:sp>
+      <p:sp>
+        <p:nvSpPr>
+          <p:cNvPr id="36" name="Text 33"/>
           <p:cNvSpPr txBox="1"/>
           <p:nvPr/>
         </p:nvSpPr>
         <p:spPr>
           <a:xfrm>
-            <a:off x="6647688" y="2706624"/>
-            <a:ext cx="4846320" cy="237744"/>
+            <a:off x="6647688" y="2468880"/>
+            <a:ext cx="274320" cy="274320"/>
+          </a:xfrm>
+          <a:prstGeom prst="rect">
+            <a:avLst/>
+          </a:prstGeom>
+          <a:noFill/>
+          <a:ln/>
+        </p:spPr>
+        <p:txBody>
+          <a:bodyPr wrap="square" lIns="0" tIns="0" rIns="0" bIns="0" rtlCol="0" anchor="ctr"/>
+          <a:lstStyle/>
+          <a:p>
+            <a:pPr algn="ctr" indent="0" marL="0">
+              <a:buNone/>
+            </a:pPr>
+            <a:r>
+              <a:rPr lang="en-US" sz="950" b="1" dirty="0">
+                <a:solidFill>
+                  <a:srgbClr val="FFFFFF"/>
+                </a:solidFill>
+                <a:latin typeface="Malgun Gothic" pitchFamily="34" charset="0"/>
+                <a:ea typeface="Malgun Gothic" pitchFamily="34" charset="-122"/>
+                <a:cs typeface="Malgun Gothic" pitchFamily="34" charset="-120"/>
+              </a:rPr>
+              <a:t>2</a:t>
+            </a:r>
+            <a:endParaRPr lang="en-US" sz="950" dirty="0"/>
+          </a:p>
+        </p:txBody>
+      </p:sp>
+      <p:sp>
+        <p:nvSpPr>
+          <p:cNvPr id="37" name="Text 34"/>
+          <p:cNvSpPr txBox="1"/>
+          <p:nvPr/>
+        </p:nvSpPr>
+        <p:spPr>
+          <a:xfrm>
+            <a:off x="7031736" y="2377440"/>
+            <a:ext cx="4462272" cy="228600"/>
           </a:xfrm>
           <a:prstGeom prst="rect">
             <a:avLst/>
@@ -2694,46 +2880,22 @@
                 <a:ea typeface="Malgun Gothic" pitchFamily="34" charset="-122"/>
                 <a:cs typeface="Malgun Gothic" pitchFamily="34" charset="-120"/>
               </a:rPr>
-              <a:t>커널  —  Matern 5/2 + ARD</a:t>
+              <a:t>소규모 데이터로 학습</a:t>
             </a:r>
             <a:endParaRPr lang="en-US" sz="1050" dirty="0"/>
           </a:p>
         </p:txBody>
       </p:sp>
-      <p:pic>
-        <p:nvPicPr>
-          <p:cNvPr id="36" name="Image 3" descr="/home/user/dddd/식/eq2.png">    </p:cNvPr>
-          <p:cNvPicPr>
-            <a:picLocks noChangeAspect="1"/>
-          </p:cNvPicPr>
-          <p:nvPr/>
-        </p:nvPicPr>
-        <p:blipFill>
-          <a:blip r:embed="rId4"/>
-          <a:stretch>
-            <a:fillRect/>
-          </a:stretch>
-        </p:blipFill>
-        <p:spPr>
-          <a:xfrm>
-            <a:off x="6739128" y="2980944"/>
-            <a:ext cx="4478426" cy="608076"/>
-          </a:xfrm>
-          <a:prstGeom prst="rect">
-            <a:avLst/>
-          </a:prstGeom>
-        </p:spPr>
-      </p:pic>
-      <p:sp>
-        <p:nvSpPr>
-          <p:cNvPr id="37" name="Text 31"/>
+      <p:sp>
+        <p:nvSpPr>
+          <p:cNvPr id="38" name="Text 35"/>
           <p:cNvSpPr txBox="1"/>
           <p:nvPr/>
         </p:nvSpPr>
         <p:spPr>
           <a:xfrm>
-            <a:off x="6647688" y="3625596"/>
-            <a:ext cx="4846320" cy="365760"/>
+            <a:off x="7031736" y="2615184"/>
+            <a:ext cx="4462272" cy="228600"/>
           </a:xfrm>
           <a:prstGeom prst="rect">
             <a:avLst/>
@@ -2746,36 +2908,97 @@
           <a:lstStyle/>
           <a:p>
             <a:pPr indent="0" marL="0">
-              <a:lnSpc>
-                <a:spcPct val="115000"/>
-              </a:lnSpc>
               <a:buNone/>
             </a:pPr>
             <a:r>
-              <a:rPr lang="en-US" sz="880" dirty="0">
+              <a:rPr lang="en-US" sz="900" dirty="0">
                 <a:solidFill>
-                  <a:srgbClr val="6B7A8F"/>
+                  <a:srgbClr val="1C2733"/>
                 </a:solidFill>
                 <a:latin typeface="Malgun Gothic" pitchFamily="34" charset="0"/>
                 <a:ea typeface="Malgun Gothic" pitchFamily="34" charset="-122"/>
                 <a:cs typeface="Malgun Gothic" pitchFamily="34" charset="-120"/>
               </a:rPr>
-              <a:t>가까운 설계일수록 결과가 비슷 · 변수마다 길이척도 ℓ_d를 따로 학습 (ℓ_d가 작을수록 민감)</a:t>
+              <a:t>80점만으로 응답 7개 모델 구축 (교차검증 R² 0.89 ~ 1.00)</a:t>
             </a:r>
-            <a:endParaRPr lang="en-US" sz="880" dirty="0"/>
+            <a:endParaRPr lang="en-US" sz="900" dirty="0"/>
           </a:p>
         </p:txBody>
       </p:sp>
       <p:sp>
         <p:nvSpPr>
-          <p:cNvPr id="38" name="Text 32"/>
+          <p:cNvPr id="39" name="Shape 36"/>
+          <p:cNvSpPr/>
+          <p:nvPr/>
+        </p:nvSpPr>
+        <p:spPr>
+          <a:xfrm>
+            <a:off x="6647688" y="3017520"/>
+            <a:ext cx="274320" cy="274320"/>
+          </a:xfrm>
+          <a:prstGeom prst="ellipse">
+            <a:avLst/>
+          </a:prstGeom>
+          <a:solidFill>
+            <a:srgbClr val="00A3C4"/>
+          </a:solidFill>
+          <a:ln w="12700">
+            <a:solidFill>
+              <a:srgbClr val="00A3C4"/>
+            </a:solidFill>
+            <a:prstDash val="solid"/>
+          </a:ln>
+        </p:spPr>
+      </p:sp>
+      <p:sp>
+        <p:nvSpPr>
+          <p:cNvPr id="40" name="Text 37"/>
           <p:cNvSpPr txBox="1"/>
           <p:nvPr/>
         </p:nvSpPr>
         <p:spPr>
           <a:xfrm>
-            <a:off x="6647688" y="4059936"/>
-            <a:ext cx="4846320" cy="237744"/>
+            <a:off x="6647688" y="3017520"/>
+            <a:ext cx="274320" cy="274320"/>
+          </a:xfrm>
+          <a:prstGeom prst="rect">
+            <a:avLst/>
+          </a:prstGeom>
+          <a:noFill/>
+          <a:ln/>
+        </p:spPr>
+        <p:txBody>
+          <a:bodyPr wrap="square" lIns="0" tIns="0" rIns="0" bIns="0" rtlCol="0" anchor="ctr"/>
+          <a:lstStyle/>
+          <a:p>
+            <a:pPr algn="ctr" indent="0" marL="0">
+              <a:buNone/>
+            </a:pPr>
+            <a:r>
+              <a:rPr lang="en-US" sz="950" b="1" dirty="0">
+                <a:solidFill>
+                  <a:srgbClr val="FFFFFF"/>
+                </a:solidFill>
+                <a:latin typeface="Malgun Gothic" pitchFamily="34" charset="0"/>
+                <a:ea typeface="Malgun Gothic" pitchFamily="34" charset="-122"/>
+                <a:cs typeface="Malgun Gothic" pitchFamily="34" charset="-120"/>
+              </a:rPr>
+              <a:t>3</a:t>
+            </a:r>
+            <a:endParaRPr lang="en-US" sz="950" dirty="0"/>
+          </a:p>
+        </p:txBody>
+      </p:sp>
+      <p:sp>
+        <p:nvSpPr>
+          <p:cNvPr id="41" name="Text 38"/>
+          <p:cNvSpPr txBox="1"/>
+          <p:nvPr/>
+        </p:nvSpPr>
+        <p:spPr>
+          <a:xfrm>
+            <a:off x="7031736" y="2926080"/>
+            <a:ext cx="4462272" cy="228600"/>
           </a:xfrm>
           <a:prstGeom prst="rect">
             <a:avLst/>
@@ -2799,46 +3022,22 @@
                 <a:ea typeface="Malgun Gothic" pitchFamily="34" charset="-122"/>
                 <a:cs typeface="Malgun Gothic" pitchFamily="34" charset="-120"/>
               </a:rPr>
-              <a:t>학습  —  하이퍼파라미터 결정</a:t>
+              <a:t>불확실성 제공</a:t>
             </a:r>
             <a:endParaRPr lang="en-US" sz="1050" dirty="0"/>
           </a:p>
         </p:txBody>
       </p:sp>
-      <p:pic>
-        <p:nvPicPr>
-          <p:cNvPr id="39" name="Image 4" descr="/home/user/dddd/식/eq4.png">    </p:cNvPr>
-          <p:cNvPicPr>
-            <a:picLocks noChangeAspect="1"/>
-          </p:cNvPicPr>
-          <p:nvPr/>
-        </p:nvPicPr>
-        <p:blipFill>
-          <a:blip r:embed="rId5"/>
-          <a:stretch>
-            <a:fillRect/>
-          </a:stretch>
-        </p:blipFill>
-        <p:spPr>
-          <a:xfrm>
-            <a:off x="6739128" y="4334256"/>
-            <a:ext cx="4523232" cy="266700"/>
-          </a:xfrm>
-          <a:prstGeom prst="rect">
-            <a:avLst/>
-          </a:prstGeom>
-        </p:spPr>
-      </p:pic>
-      <p:sp>
-        <p:nvSpPr>
-          <p:cNvPr id="40" name="Text 33"/>
+      <p:sp>
+        <p:nvSpPr>
+          <p:cNvPr id="42" name="Text 39"/>
           <p:cNvSpPr txBox="1"/>
           <p:nvPr/>
         </p:nvSpPr>
         <p:spPr>
           <a:xfrm>
-            <a:off x="6647688" y="4637532"/>
-            <a:ext cx="4846320" cy="237744"/>
+            <a:off x="7031736" y="3163824"/>
+            <a:ext cx="4462272" cy="228600"/>
           </a:xfrm>
           <a:prstGeom prst="rect">
             <a:avLst/>
@@ -2851,23 +3050,201 @@
           <a:lstStyle/>
           <a:p>
             <a:pPr indent="0" marL="0">
-              <a:lnSpc>
-                <a:spcPct val="115000"/>
-              </a:lnSpc>
               <a:buNone/>
             </a:pPr>
             <a:r>
-              <a:rPr lang="en-US" sz="880" dirty="0">
+              <a:rPr lang="en-US" sz="900" dirty="0">
                 <a:solidFill>
-                  <a:srgbClr val="6B7A8F"/>
+                  <a:srgbClr val="1C2733"/>
                 </a:solidFill>
                 <a:latin typeface="Malgun Gothic" pitchFamily="34" charset="0"/>
                 <a:ea typeface="Malgun Gothic" pitchFamily="34" charset="-122"/>
                 <a:cs typeface="Malgun Gothic" pitchFamily="34" charset="-120"/>
               </a:rPr>
-              <a:t>θ = {σ_f, ℓ₁~ℓ₈, σ_n} : 이 데이터가 나올 가능성(우도)이 최대가 되도록 결정</a:t>
+              <a:t>예측을 얼마나 믿을지 함께 제공 → 추가 해석 위치 선정에 활용</a:t>
             </a:r>
-            <a:endParaRPr lang="en-US" sz="880" dirty="0"/>
+            <a:endParaRPr lang="en-US" sz="900" dirty="0"/>
+          </a:p>
+        </p:txBody>
+      </p:sp>
+      <p:sp>
+        <p:nvSpPr>
+          <p:cNvPr id="43" name="Shape 40"/>
+          <p:cNvSpPr/>
+          <p:nvPr/>
+        </p:nvSpPr>
+        <p:spPr>
+          <a:xfrm>
+            <a:off x="6647688" y="3566160"/>
+            <a:ext cx="274320" cy="274320"/>
+          </a:xfrm>
+          <a:prstGeom prst="ellipse">
+            <a:avLst/>
+          </a:prstGeom>
+          <a:solidFill>
+            <a:srgbClr val="00A3C4"/>
+          </a:solidFill>
+          <a:ln w="12700">
+            <a:solidFill>
+              <a:srgbClr val="00A3C4"/>
+            </a:solidFill>
+            <a:prstDash val="solid"/>
+          </a:ln>
+        </p:spPr>
+      </p:sp>
+      <p:sp>
+        <p:nvSpPr>
+          <p:cNvPr id="44" name="Text 41"/>
+          <p:cNvSpPr txBox="1"/>
+          <p:nvPr/>
+        </p:nvSpPr>
+        <p:spPr>
+          <a:xfrm>
+            <a:off x="6647688" y="3566160"/>
+            <a:ext cx="274320" cy="274320"/>
+          </a:xfrm>
+          <a:prstGeom prst="rect">
+            <a:avLst/>
+          </a:prstGeom>
+          <a:noFill/>
+          <a:ln/>
+        </p:spPr>
+        <p:txBody>
+          <a:bodyPr wrap="square" lIns="0" tIns="0" rIns="0" bIns="0" rtlCol="0" anchor="ctr"/>
+          <a:lstStyle/>
+          <a:p>
+            <a:pPr algn="ctr" indent="0" marL="0">
+              <a:buNone/>
+            </a:pPr>
+            <a:r>
+              <a:rPr lang="en-US" sz="950" b="1" dirty="0">
+                <a:solidFill>
+                  <a:srgbClr val="FFFFFF"/>
+                </a:solidFill>
+                <a:latin typeface="Malgun Gothic" pitchFamily="34" charset="0"/>
+                <a:ea typeface="Malgun Gothic" pitchFamily="34" charset="-122"/>
+                <a:cs typeface="Malgun Gothic" pitchFamily="34" charset="-120"/>
+              </a:rPr>
+              <a:t>4</a:t>
+            </a:r>
+            <a:endParaRPr lang="en-US" sz="950" dirty="0"/>
+          </a:p>
+        </p:txBody>
+      </p:sp>
+      <p:sp>
+        <p:nvSpPr>
+          <p:cNvPr id="45" name="Text 42"/>
+          <p:cNvSpPr txBox="1"/>
+          <p:nvPr/>
+        </p:nvSpPr>
+        <p:spPr>
+          <a:xfrm>
+            <a:off x="7031736" y="3474720"/>
+            <a:ext cx="4462272" cy="228600"/>
+          </a:xfrm>
+          <a:prstGeom prst="rect">
+            <a:avLst/>
+          </a:prstGeom>
+          <a:noFill/>
+          <a:ln/>
+        </p:spPr>
+        <p:txBody>
+          <a:bodyPr wrap="square" lIns="0" tIns="0" rIns="0" bIns="0" rtlCol="0" anchor="ctr"/>
+          <a:lstStyle/>
+          <a:p>
+            <a:pPr indent="0" marL="0">
+              <a:buNone/>
+            </a:pPr>
+            <a:r>
+              <a:rPr lang="en-US" sz="1050" b="1" dirty="0">
+                <a:solidFill>
+                  <a:srgbClr val="16305B"/>
+                </a:solidFill>
+                <a:latin typeface="Malgun Gothic" pitchFamily="34" charset="0"/>
+                <a:ea typeface="Malgun Gothic" pitchFamily="34" charset="-122"/>
+                <a:cs typeface="Malgun Gothic" pitchFamily="34" charset="-120"/>
+              </a:rPr>
+              <a:t>변수별 민감도</a:t>
+            </a:r>
+            <a:endParaRPr lang="en-US" sz="1050" dirty="0"/>
+          </a:p>
+        </p:txBody>
+      </p:sp>
+      <p:sp>
+        <p:nvSpPr>
+          <p:cNvPr id="46" name="Text 43"/>
+          <p:cNvSpPr txBox="1"/>
+          <p:nvPr/>
+        </p:nvSpPr>
+        <p:spPr>
+          <a:xfrm>
+            <a:off x="7031736" y="3712464"/>
+            <a:ext cx="4462272" cy="228600"/>
+          </a:xfrm>
+          <a:prstGeom prst="rect">
+            <a:avLst/>
+          </a:prstGeom>
+          <a:noFill/>
+          <a:ln/>
+        </p:spPr>
+        <p:txBody>
+          <a:bodyPr wrap="square" lIns="0" tIns="0" rIns="0" bIns="0" rtlCol="0" anchor="ctr"/>
+          <a:lstStyle/>
+          <a:p>
+            <a:pPr indent="0" marL="0">
+              <a:buNone/>
+            </a:pPr>
+            <a:r>
+              <a:rPr lang="en-US" sz="900" dirty="0">
+                <a:solidFill>
+                  <a:srgbClr val="1C2733"/>
+                </a:solidFill>
+                <a:latin typeface="Malgun Gothic" pitchFamily="34" charset="0"/>
+                <a:ea typeface="Malgun Gothic" pitchFamily="34" charset="-122"/>
+                <a:cs typeface="Malgun Gothic" pitchFamily="34" charset="-120"/>
+              </a:rPr>
+              <a:t>변수마다 길이척도를 따로 학습 → 영향 큰 변수 확인</a:t>
+            </a:r>
+            <a:endParaRPr lang="en-US" sz="900" dirty="0"/>
+          </a:p>
+        </p:txBody>
+      </p:sp>
+      <p:sp>
+        <p:nvSpPr>
+          <p:cNvPr id="47" name="Text 44"/>
+          <p:cNvSpPr txBox="1"/>
+          <p:nvPr/>
+        </p:nvSpPr>
+        <p:spPr>
+          <a:xfrm>
+            <a:off x="6647688" y="4114800"/>
+            <a:ext cx="4846320" cy="237744"/>
+          </a:xfrm>
+          <a:prstGeom prst="rect">
+            <a:avLst/>
+          </a:prstGeom>
+          <a:noFill/>
+          <a:ln/>
+        </p:spPr>
+        <p:txBody>
+          <a:bodyPr wrap="square" lIns="0" tIns="0" rIns="0" bIns="0" rtlCol="0" anchor="ctr"/>
+          <a:lstStyle/>
+          <a:p>
+            <a:pPr indent="0" marL="0">
+              <a:buNone/>
+            </a:pPr>
+            <a:r>
+              <a:rPr lang="en-US" sz="1050" b="1" dirty="0">
+                <a:solidFill>
+                  <a:srgbClr val="16305B"/>
+                </a:solidFill>
+                <a:latin typeface="Malgun Gothic" pitchFamily="34" charset="0"/>
+                <a:ea typeface="Malgun Gothic" pitchFamily="34" charset="-122"/>
+                <a:cs typeface="Malgun Gothic" pitchFamily="34" charset="-120"/>
+              </a:rPr>
+              <a:t>모델 구성</a:t>
+            </a:r>
+            <a:endParaRPr lang="en-US" sz="1050" dirty="0"/>
           </a:p>
         </p:txBody>
       </p:sp>
@@ -2886,7 +3263,7 @@
           </p:nvPr>
         </p:nvGraphicFramePr>
         <p:xfrm>
-          <a:off x="6647688" y="5029200"/>
+          <a:off x="6647688" y="4407408"/>
           <a:ext cx="4846320" cy="914400"/>
         </p:xfrm>
         <a:graphic>
@@ -2894,8 +3271,8 @@
             <a:tbl>
               <a:tblPr/>
               <a:tblGrid>
-                <a:gridCol w="1097280"/>
-                <a:gridCol w="3749040"/>
+                <a:gridCol w="1051560"/>
+                <a:gridCol w="3794760"/>
               </a:tblGrid>
               <a:tr h="274320">
                 <a:tc>
@@ -2915,7 +3292,7 @@
                           <a:ea typeface="Malgun Gothic" pitchFamily="34" charset="-122"/>
                           <a:cs typeface="Malgun Gothic" pitchFamily="34" charset="-120"/>
                         </a:rPr>
-                        <a:t>학습 구성</a:t>
+                        <a:t>항목</a:t>
                       </a:r>
                       <a:endParaRPr lang="en-US" sz="900" dirty="0">
                         <a:latin typeface="Malgun Gothic" charset="0"/>
@@ -3017,7 +3394,7 @@
                           <a:ea typeface="Malgun Gothic" pitchFamily="34" charset="-122"/>
                           <a:cs typeface="Malgun Gothic" pitchFamily="34" charset="-120"/>
                         </a:rPr>
-                        <a:t>입력 → 출력</a:t>
+                        <a:t>커널</a:t>
                       </a:r>
                       <a:endParaRPr lang="en-US" sz="900" dirty="0">
                         <a:latin typeface="Malgun Gothic" charset="0"/>
@@ -3064,7 +3441,28 @@
                           <a:ea typeface="Malgun Gothic" pitchFamily="34" charset="-122"/>
                           <a:cs typeface="Malgun Gothic" pitchFamily="34" charset="-120"/>
                         </a:rPr>
-                        <a:t>활성 변수 8개 (0 ~ 1 정규화) → 응답 7개, 응답별 모델 1개</a:t>
+                        <a:t>Matern 5/2 + ARD — 가까운 설계일수록 결과가 비슷,</a:t>
+                      </a:r>
+                      <a:endParaRPr lang="en-US" sz="900" dirty="0">
+                        <a:latin typeface="Malgun Gothic" charset="0"/>
+                        <a:ea typeface="Malgun Gothic" charset="0"/>
+                        <a:cs typeface="Malgun Gothic" charset="0"/>
+                      </a:endParaRPr>
+                    </a:p>
+                    <a:p>
+                      <a:pPr indent="0" marL="0">
+                        <a:buNone/>
+                      </a:pPr>
+                      <a:r>
+                        <a:rPr lang="en-US" sz="900" dirty="0">
+                          <a:solidFill>
+                            <a:srgbClr val="1C2733"/>
+                          </a:solidFill>
+                          <a:latin typeface="Malgun Gothic" pitchFamily="34" charset="0"/>
+                          <a:ea typeface="Malgun Gothic" pitchFamily="34" charset="-122"/>
+                          <a:cs typeface="Malgun Gothic" pitchFamily="34" charset="-120"/>
+                        </a:rPr>
+                        <a:t>변수마다 민감도(길이척도)를 따로 학습</a:t>
                       </a:r>
                       <a:endParaRPr lang="en-US" sz="900" dirty="0">
                         <a:latin typeface="Malgun Gothic" charset="0"/>
@@ -3113,7 +3511,7 @@
                           <a:ea typeface="Malgun Gothic" pitchFamily="34" charset="-122"/>
                           <a:cs typeface="Malgun Gothic" pitchFamily="34" charset="-120"/>
                         </a:rPr>
-                        <a:t>전처리</a:t>
+                        <a:t>학습</a:t>
                       </a:r>
                       <a:endParaRPr lang="en-US" sz="900" dirty="0">
                         <a:latin typeface="Malgun Gothic" charset="0"/>
@@ -3160,7 +3558,124 @@
                           <a:ea typeface="Malgun Gothic" pitchFamily="34" charset="-122"/>
                           <a:cs typeface="Malgun Gothic" pitchFamily="34" charset="-120"/>
                         </a:rPr>
-                        <a:t>차압은 로그 변환 (값의 범위가 넓음)</a:t>
+                        <a:t>해석 데이터가 나올 가능성(우도)이 최대가 되도록</a:t>
+                      </a:r>
+                      <a:endParaRPr lang="en-US" sz="900" dirty="0">
+                        <a:latin typeface="Malgun Gothic" charset="0"/>
+                        <a:ea typeface="Malgun Gothic" charset="0"/>
+                        <a:cs typeface="Malgun Gothic" charset="0"/>
+                      </a:endParaRPr>
+                    </a:p>
+                    <a:p>
+                      <a:pPr indent="0" marL="0">
+                        <a:buNone/>
+                      </a:pPr>
+                      <a:r>
+                        <a:rPr lang="en-US" sz="900" dirty="0">
+                          <a:solidFill>
+                            <a:srgbClr val="1C2733"/>
+                          </a:solidFill>
+                          <a:latin typeface="Malgun Gothic" pitchFamily="34" charset="0"/>
+                          <a:ea typeface="Malgun Gothic" pitchFamily="34" charset="-122"/>
+                          <a:cs typeface="Malgun Gothic" pitchFamily="34" charset="-120"/>
+                        </a:rPr>
+                        <a:t>하이퍼파라미터 자동 결정</a:t>
+                      </a:r>
+                      <a:endParaRPr lang="en-US" sz="900" dirty="0">
+                        <a:latin typeface="Malgun Gothic" charset="0"/>
+                        <a:ea typeface="Malgun Gothic" charset="0"/>
+                        <a:cs typeface="Malgun Gothic" charset="0"/>
+                      </a:endParaRPr>
+                    </a:p>
+                  </a:txBody>
+                  <a:tcPr marL="50800" marR="50800" marT="25400" marB="25400" anchor="ctr">
+                    <a:lnL w="0" cap="flat" cmpd="sng" algn="ctr">
+                      <a:noFill/>
+                    </a:lnL>
+                    <a:lnR w="0" cap="flat" cmpd="sng" algn="ctr">
+                      <a:noFill/>
+                    </a:lnR>
+                    <a:lnT w="0" cap="flat" cmpd="sng" algn="ctr">
+                      <a:noFill/>
+                    </a:lnT>
+                    <a:lnB w="6350" cap="flat" cmpd="sng" algn="ctr">
+                      <a:solidFill>
+                        <a:srgbClr val="DDE3EB"/>
+                      </a:solidFill>
+                      <a:prstDash val="solid"/>
+                      <a:round/>
+                      <a:headEnd type="none" w="med" len="med"/>
+                      <a:tailEnd type="none" w="med" len="med"/>
+                    </a:lnB>
+                  </a:tcPr>
+                </a:tc>
+              </a:tr>
+              <a:tr h="274320">
+                <a:tc>
+                  <a:txBody>
+                    <a:bodyPr/>
+                    <a:lstStyle/>
+                    <a:p>
+                      <a:pPr indent="0" marL="0">
+                        <a:buNone/>
+                      </a:pPr>
+                      <a:r>
+                        <a:rPr lang="en-US" sz="900" dirty="0">
+                          <a:solidFill>
+                            <a:srgbClr val="1C2733"/>
+                          </a:solidFill>
+                          <a:latin typeface="Malgun Gothic" pitchFamily="34" charset="0"/>
+                          <a:ea typeface="Malgun Gothic" pitchFamily="34" charset="-122"/>
+                          <a:cs typeface="Malgun Gothic" pitchFamily="34" charset="-120"/>
+                        </a:rPr>
+                        <a:t>입력 → 출력</a:t>
+                      </a:r>
+                      <a:endParaRPr lang="en-US" sz="900" dirty="0">
+                        <a:latin typeface="Malgun Gothic" charset="0"/>
+                        <a:ea typeface="Malgun Gothic" charset="0"/>
+                        <a:cs typeface="Malgun Gothic" charset="0"/>
+                      </a:endParaRPr>
+                    </a:p>
+                  </a:txBody>
+                  <a:tcPr marL="50800" marR="50800" marT="25400" marB="25400" anchor="ctr">
+                    <a:lnL w="0" cap="flat" cmpd="sng" algn="ctr">
+                      <a:noFill/>
+                    </a:lnL>
+                    <a:lnR w="0" cap="flat" cmpd="sng" algn="ctr">
+                      <a:noFill/>
+                    </a:lnR>
+                    <a:lnT w="0" cap="flat" cmpd="sng" algn="ctr">
+                      <a:noFill/>
+                    </a:lnT>
+                    <a:lnB w="6350" cap="flat" cmpd="sng" algn="ctr">
+                      <a:solidFill>
+                        <a:srgbClr val="DDE3EB"/>
+                      </a:solidFill>
+                      <a:prstDash val="solid"/>
+                      <a:round/>
+                      <a:headEnd type="none" w="med" len="med"/>
+                      <a:tailEnd type="none" w="med" len="med"/>
+                    </a:lnB>
+                  </a:tcPr>
+                </a:tc>
+                <a:tc>
+                  <a:txBody>
+                    <a:bodyPr/>
+                    <a:lstStyle/>
+                    <a:p>
+                      <a:pPr indent="0" marL="0">
+                        <a:buNone/>
+                      </a:pPr>
+                      <a:r>
+                        <a:rPr lang="en-US" sz="900" dirty="0">
+                          <a:solidFill>
+                            <a:srgbClr val="1C2733"/>
+                          </a:solidFill>
+                          <a:latin typeface="Malgun Gothic" pitchFamily="34" charset="0"/>
+                          <a:ea typeface="Malgun Gothic" pitchFamily="34" charset="-122"/>
+                          <a:cs typeface="Malgun Gothic" pitchFamily="34" charset="-120"/>
+                        </a:rPr>
+                        <a:t>활성 변수 8개 → 응답 7개, 응답별 모델 1개</a:t>
                       </a:r>
                       <a:endParaRPr lang="en-US" sz="900" dirty="0">
                         <a:latin typeface="Malgun Gothic" charset="0"/>
@@ -3195,6 +3710,724 @@
           </a:graphicData>
         </a:graphic>
       </p:graphicFrame>
+    </p:spTree>
+  </p:cSld>
+  <p:clrMapOvr>
+    <a:masterClrMapping/>
+  </p:clrMapOvr>
+</p:sld>
+</file>
+
+<file path=ppt/slides/slide2.xml><?xml version="1.0" encoding="utf-8"?>
+<p:sld xmlns:a="http://schemas.openxmlformats.org/drawingml/2006/main" xmlns:r="http://schemas.openxmlformats.org/officeDocument/2006/relationships" xmlns:p="http://schemas.openxmlformats.org/presentationml/2006/main">
+  <p:cSld name="Slide 2">
+    <p:bg>
+      <p:bgPr>
+        <a:solidFill>
+          <a:srgbClr val="F3F5F8"/>
+        </a:solidFill>
+      </p:bgPr>
+    </p:bg>
+    <p:spTree>
+      <p:nvGrpSpPr>
+        <p:cNvPr id="1" name=""/>
+        <p:cNvGrpSpPr/>
+        <p:nvPr/>
+      </p:nvGrpSpPr>
+      <p:grpSpPr>
+        <a:xfrm>
+          <a:off x="0" y="0"/>
+          <a:ext cx="0" cy="0"/>
+          <a:chOff x="0" y="0"/>
+          <a:chExt cx="0" cy="0"/>
+        </a:xfrm>
+      </p:grpSpPr>
+      <p:sp>
+        <p:nvSpPr>
+          <p:cNvPr id="2" name="Shape 0"/>
+          <p:cNvSpPr/>
+          <p:nvPr/>
+        </p:nvSpPr>
+        <p:spPr>
+          <a:xfrm>
+            <a:off x="502920" y="384048"/>
+            <a:ext cx="475488" cy="475488"/>
+          </a:xfrm>
+          <a:prstGeom prst="rect">
+            <a:avLst/>
+          </a:prstGeom>
+          <a:solidFill>
+            <a:srgbClr val="16305B"/>
+          </a:solidFill>
+          <a:ln w="12700">
+            <a:solidFill>
+              <a:srgbClr val="16305B"/>
+            </a:solidFill>
+            <a:prstDash val="solid"/>
+          </a:ln>
+        </p:spPr>
+      </p:sp>
+      <p:sp>
+        <p:nvSpPr>
+          <p:cNvPr id="3" name="Text 1"/>
+          <p:cNvSpPr txBox="1"/>
+          <p:nvPr/>
+        </p:nvSpPr>
+        <p:spPr>
+          <a:xfrm>
+            <a:off x="502920" y="384048"/>
+            <a:ext cx="475488" cy="475488"/>
+          </a:xfrm>
+          <a:prstGeom prst="rect">
+            <a:avLst/>
+          </a:prstGeom>
+          <a:noFill/>
+          <a:ln/>
+        </p:spPr>
+        <p:txBody>
+          <a:bodyPr wrap="square" lIns="0" tIns="0" rIns="0" bIns="0" rtlCol="0" anchor="ctr"/>
+          <a:lstStyle/>
+          <a:p>
+            <a:pPr algn="ctr" indent="0" marL="0">
+              <a:buNone/>
+            </a:pPr>
+            <a:r>
+              <a:rPr lang="en-US" sz="1600" b="1" dirty="0">
+                <a:solidFill>
+                  <a:srgbClr val="FFFFFF"/>
+                </a:solidFill>
+                <a:latin typeface="Malgun Gothic" pitchFamily="34" charset="0"/>
+                <a:ea typeface="Malgun Gothic" pitchFamily="34" charset="-122"/>
+                <a:cs typeface="Malgun Gothic" pitchFamily="34" charset="-120"/>
+              </a:rPr>
+              <a:t>A</a:t>
+            </a:r>
+            <a:endParaRPr lang="en-US" sz="1600" dirty="0"/>
+          </a:p>
+        </p:txBody>
+      </p:sp>
+      <p:sp>
+        <p:nvSpPr>
+          <p:cNvPr id="4" name="Text 2"/>
+          <p:cNvSpPr txBox="1"/>
+          <p:nvPr/>
+        </p:nvSpPr>
+        <p:spPr>
+          <a:xfrm>
+            <a:off x="1124712" y="365760"/>
+            <a:ext cx="7315200" cy="237744"/>
+          </a:xfrm>
+          <a:prstGeom prst="rect">
+            <a:avLst/>
+          </a:prstGeom>
+          <a:noFill/>
+          <a:ln/>
+        </p:spPr>
+        <p:txBody>
+          <a:bodyPr wrap="square" lIns="0" tIns="0" rIns="0" bIns="0" rtlCol="0" anchor="ctr"/>
+          <a:lstStyle/>
+          <a:p>
+            <a:pPr indent="0" marL="0">
+              <a:buNone/>
+            </a:pPr>
+            <a:r>
+              <a:rPr lang="en-US" sz="1050" b="1" spc="100" kern="0" dirty="0">
+                <a:solidFill>
+                  <a:srgbClr val="00A3C4"/>
+                </a:solidFill>
+                <a:latin typeface="Malgun Gothic" pitchFamily="34" charset="0"/>
+                <a:ea typeface="Malgun Gothic" pitchFamily="34" charset="-122"/>
+                <a:cs typeface="Malgun Gothic" pitchFamily="34" charset="-120"/>
+              </a:rPr>
+              <a:t>부록</a:t>
+            </a:r>
+            <a:endParaRPr lang="en-US" sz="1050" dirty="0"/>
+          </a:p>
+        </p:txBody>
+      </p:sp>
+      <p:sp>
+        <p:nvSpPr>
+          <p:cNvPr id="5" name="Text 3"/>
+          <p:cNvSpPr txBox="1"/>
+          <p:nvPr/>
+        </p:nvSpPr>
+        <p:spPr>
+          <a:xfrm>
+            <a:off x="1124712" y="548640"/>
+            <a:ext cx="10607040" cy="384048"/>
+          </a:xfrm>
+          <a:prstGeom prst="rect">
+            <a:avLst/>
+          </a:prstGeom>
+          <a:noFill/>
+          <a:ln/>
+        </p:spPr>
+        <p:txBody>
+          <a:bodyPr wrap="square" lIns="0" tIns="0" rIns="0" bIns="0" rtlCol="0" anchor="ctr"/>
+          <a:lstStyle/>
+          <a:p>
+            <a:pPr indent="0" marL="0">
+              <a:buNone/>
+            </a:pPr>
+            <a:r>
+              <a:rPr lang="en-US" sz="2200" b="1" dirty="0">
+                <a:solidFill>
+                  <a:srgbClr val="16305B"/>
+                </a:solidFill>
+                <a:latin typeface="Malgun Gothic" pitchFamily="34" charset="0"/>
+                <a:ea typeface="Malgun Gothic" pitchFamily="34" charset="-122"/>
+                <a:cs typeface="Malgun Gothic" pitchFamily="34" charset="-120"/>
+              </a:rPr>
+              <a:t>GPR 수식  (질의응답용)</a:t>
+            </a:r>
+            <a:endParaRPr lang="en-US" sz="2200" dirty="0"/>
+          </a:p>
+        </p:txBody>
+      </p:sp>
+      <p:sp>
+        <p:nvSpPr>
+          <p:cNvPr id="6" name="Shape 4"/>
+          <p:cNvSpPr/>
+          <p:nvPr/>
+        </p:nvSpPr>
+        <p:spPr>
+          <a:xfrm>
+            <a:off x="502920" y="1188720"/>
+            <a:ext cx="11183112" cy="5074920"/>
+          </a:xfrm>
+          <a:prstGeom prst="roundRect">
+            <a:avLst>
+              <a:gd name="adj" fmla="val 1081"/>
+            </a:avLst>
+          </a:prstGeom>
+          <a:solidFill>
+            <a:srgbClr val="FFFFFF"/>
+          </a:solidFill>
+          <a:ln w="9525">
+            <a:solidFill>
+              <a:srgbClr val="DDE3EB"/>
+            </a:solidFill>
+            <a:prstDash val="solid"/>
+          </a:ln>
+          <a:effectLst>
+            <a:outerShdw sx="100000" sy="100000" kx="0" ky="0" algn="bl" rotWithShape="0" blurRad="101600" dist="12700" dir="5400000">
+              <a:srgbClr val="9AA8BC">
+                <a:alpha val="18000"/>
+              </a:srgbClr>
+            </a:outerShdw>
+          </a:effectLst>
+        </p:spPr>
+      </p:sp>
+      <p:sp>
+        <p:nvSpPr>
+          <p:cNvPr id="7" name="Text 5"/>
+          <p:cNvSpPr txBox="1"/>
+          <p:nvPr/>
+        </p:nvSpPr>
+        <p:spPr>
+          <a:xfrm>
+            <a:off x="813816" y="1508760"/>
+            <a:ext cx="2926080" cy="274320"/>
+          </a:xfrm>
+          <a:prstGeom prst="rect">
+            <a:avLst/>
+          </a:prstGeom>
+          <a:noFill/>
+          <a:ln/>
+        </p:spPr>
+        <p:txBody>
+          <a:bodyPr wrap="square" lIns="0" tIns="0" rIns="0" bIns="0" rtlCol="0" anchor="ctr"/>
+          <a:lstStyle/>
+          <a:p>
+            <a:pPr indent="0" marL="0">
+              <a:buNone/>
+            </a:pPr>
+            <a:r>
+              <a:rPr lang="en-US" sz="1100" b="1" dirty="0">
+                <a:solidFill>
+                  <a:srgbClr val="16305B"/>
+                </a:solidFill>
+                <a:latin typeface="Malgun Gothic" pitchFamily="34" charset="0"/>
+                <a:ea typeface="Malgun Gothic" pitchFamily="34" charset="-122"/>
+                <a:cs typeface="Malgun Gothic" pitchFamily="34" charset="-120"/>
+              </a:rPr>
+              <a:t>모델 가정</a:t>
+            </a:r>
+            <a:endParaRPr lang="en-US" sz="1100" dirty="0"/>
+          </a:p>
+        </p:txBody>
+      </p:sp>
+      <p:sp>
+        <p:nvSpPr>
+          <p:cNvPr id="8" name="Text 6"/>
+          <p:cNvSpPr txBox="1"/>
+          <p:nvPr/>
+        </p:nvSpPr>
+        <p:spPr>
+          <a:xfrm>
+            <a:off x="813816" y="1801368"/>
+            <a:ext cx="2926080" cy="457200"/>
+          </a:xfrm>
+          <a:prstGeom prst="rect">
+            <a:avLst/>
+          </a:prstGeom>
+          <a:noFill/>
+          <a:ln/>
+        </p:spPr>
+        <p:txBody>
+          <a:bodyPr wrap="square" lIns="0" tIns="0" rIns="0" bIns="0" rtlCol="0" anchor="t"/>
+          <a:lstStyle/>
+          <a:p>
+            <a:pPr indent="0" marL="0">
+              <a:buNone/>
+            </a:pPr>
+            <a:r>
+              <a:rPr lang="en-US" sz="900" dirty="0">
+                <a:solidFill>
+                  <a:srgbClr val="6B7A8F"/>
+                </a:solidFill>
+                <a:latin typeface="Malgun Gothic" pitchFamily="34" charset="0"/>
+                <a:ea typeface="Malgun Gothic" pitchFamily="34" charset="-122"/>
+                <a:cs typeface="Malgun Gothic" pitchFamily="34" charset="-120"/>
+              </a:rPr>
+              <a:t>해석 결과 = 매끄러운 함수 + 작은 수치 오차</a:t>
+            </a:r>
+            <a:endParaRPr lang="en-US" sz="900" dirty="0"/>
+          </a:p>
+        </p:txBody>
+      </p:sp>
+      <p:pic>
+        <p:nvPicPr>
+          <p:cNvPr id="9" name="Image 0" descr="/home/user/dddd/식/eq1.png">    </p:cNvPr>
+          <p:cNvPicPr>
+            <a:picLocks noChangeAspect="1"/>
+          </p:cNvPicPr>
+          <p:nvPr/>
+        </p:nvPicPr>
+        <p:blipFill>
+          <a:blip r:embed="rId1"/>
+          <a:stretch>
+            <a:fillRect/>
+          </a:stretch>
+        </p:blipFill>
+        <p:spPr>
+          <a:xfrm>
+            <a:off x="4014216" y="1508760"/>
+            <a:ext cx="3441253" cy="226771"/>
+          </a:xfrm>
+          <a:prstGeom prst="rect">
+            <a:avLst/>
+          </a:prstGeom>
+        </p:spPr>
+      </p:pic>
+      <p:sp>
+        <p:nvSpPr>
+          <p:cNvPr id="10" name="Text 7"/>
+          <p:cNvSpPr txBox="1"/>
+          <p:nvPr/>
+        </p:nvSpPr>
+        <p:spPr>
+          <a:xfrm>
+            <a:off x="813816" y="2441448"/>
+            <a:ext cx="2926080" cy="274320"/>
+          </a:xfrm>
+          <a:prstGeom prst="rect">
+            <a:avLst/>
+          </a:prstGeom>
+          <a:noFill/>
+          <a:ln/>
+        </p:spPr>
+        <p:txBody>
+          <a:bodyPr wrap="square" lIns="0" tIns="0" rIns="0" bIns="0" rtlCol="0" anchor="ctr"/>
+          <a:lstStyle/>
+          <a:p>
+            <a:pPr indent="0" marL="0">
+              <a:buNone/>
+            </a:pPr>
+            <a:r>
+              <a:rPr lang="en-US" sz="1100" b="1" dirty="0">
+                <a:solidFill>
+                  <a:srgbClr val="16305B"/>
+                </a:solidFill>
+                <a:latin typeface="Malgun Gothic" pitchFamily="34" charset="0"/>
+                <a:ea typeface="Malgun Gothic" pitchFamily="34" charset="-122"/>
+                <a:cs typeface="Malgun Gothic" pitchFamily="34" charset="-120"/>
+              </a:rPr>
+              <a:t>커널 — Matern 5/2 + ARD</a:t>
+            </a:r>
+            <a:endParaRPr lang="en-US" sz="1100" dirty="0"/>
+          </a:p>
+        </p:txBody>
+      </p:sp>
+      <p:sp>
+        <p:nvSpPr>
+          <p:cNvPr id="11" name="Text 8"/>
+          <p:cNvSpPr txBox="1"/>
+          <p:nvPr/>
+        </p:nvSpPr>
+        <p:spPr>
+          <a:xfrm>
+            <a:off x="813816" y="2734056"/>
+            <a:ext cx="2926080" cy="457200"/>
+          </a:xfrm>
+          <a:prstGeom prst="rect">
+            <a:avLst/>
+          </a:prstGeom>
+          <a:noFill/>
+          <a:ln/>
+        </p:spPr>
+        <p:txBody>
+          <a:bodyPr wrap="square" lIns="0" tIns="0" rIns="0" bIns="0" rtlCol="0" anchor="t"/>
+          <a:lstStyle/>
+          <a:p>
+            <a:pPr indent="0" marL="0">
+              <a:buNone/>
+            </a:pPr>
+            <a:r>
+              <a:rPr lang="en-US" sz="900" dirty="0">
+                <a:solidFill>
+                  <a:srgbClr val="6B7A8F"/>
+                </a:solidFill>
+                <a:latin typeface="Malgun Gothic" pitchFamily="34" charset="0"/>
+                <a:ea typeface="Malgun Gothic" pitchFamily="34" charset="-122"/>
+                <a:cs typeface="Malgun Gothic" pitchFamily="34" charset="-120"/>
+              </a:rPr>
+              <a:t>가까운 설계일수록 결과가 비슷 · 변수마다 길이척도 ℓ_d (작을수록 민감)</a:t>
+            </a:r>
+            <a:endParaRPr lang="en-US" sz="900" dirty="0"/>
+          </a:p>
+        </p:txBody>
+      </p:sp>
+      <p:pic>
+        <p:nvPicPr>
+          <p:cNvPr id="12" name="Image 1" descr="/home/user/dddd/식/eq2.png">    </p:cNvPr>
+          <p:cNvPicPr>
+            <a:picLocks noChangeAspect="1"/>
+          </p:cNvPicPr>
+          <p:nvPr/>
+        </p:nvPicPr>
+        <p:blipFill>
+          <a:blip r:embed="rId2"/>
+          <a:stretch>
+            <a:fillRect/>
+          </a:stretch>
+        </p:blipFill>
+        <p:spPr>
+          <a:xfrm>
+            <a:off x="4014216" y="2441448"/>
+            <a:ext cx="3966606" cy="538582"/>
+          </a:xfrm>
+          <a:prstGeom prst="rect">
+            <a:avLst/>
+          </a:prstGeom>
+        </p:spPr>
+      </p:pic>
+      <p:sp>
+        <p:nvSpPr>
+          <p:cNvPr id="13" name="Text 9"/>
+          <p:cNvSpPr txBox="1"/>
+          <p:nvPr/>
+        </p:nvSpPr>
+        <p:spPr>
+          <a:xfrm>
+            <a:off x="813816" y="3374136"/>
+            <a:ext cx="2926080" cy="274320"/>
+          </a:xfrm>
+          <a:prstGeom prst="rect">
+            <a:avLst/>
+          </a:prstGeom>
+          <a:noFill/>
+          <a:ln/>
+        </p:spPr>
+        <p:txBody>
+          <a:bodyPr wrap="square" lIns="0" tIns="0" rIns="0" bIns="0" rtlCol="0" anchor="ctr"/>
+          <a:lstStyle/>
+          <a:p>
+            <a:pPr indent="0" marL="0">
+              <a:buNone/>
+            </a:pPr>
+            <a:r>
+              <a:rPr lang="en-US" sz="1100" b="1" dirty="0">
+                <a:solidFill>
+                  <a:srgbClr val="16305B"/>
+                </a:solidFill>
+                <a:latin typeface="Malgun Gothic" pitchFamily="34" charset="0"/>
+                <a:ea typeface="Malgun Gothic" pitchFamily="34" charset="-122"/>
+                <a:cs typeface="Malgun Gothic" pitchFamily="34" charset="-120"/>
+              </a:rPr>
+              <a:t>예측 평균</a:t>
+            </a:r>
+            <a:endParaRPr lang="en-US" sz="1100" dirty="0"/>
+          </a:p>
+        </p:txBody>
+      </p:sp>
+      <p:sp>
+        <p:nvSpPr>
+          <p:cNvPr id="14" name="Text 10"/>
+          <p:cNvSpPr txBox="1"/>
+          <p:nvPr/>
+        </p:nvSpPr>
+        <p:spPr>
+          <a:xfrm>
+            <a:off x="813816" y="3666744"/>
+            <a:ext cx="2926080" cy="457200"/>
+          </a:xfrm>
+          <a:prstGeom prst="rect">
+            <a:avLst/>
+          </a:prstGeom>
+          <a:noFill/>
+          <a:ln/>
+        </p:spPr>
+        <p:txBody>
+          <a:bodyPr wrap="square" lIns="0" tIns="0" rIns="0" bIns="0" rtlCol="0" anchor="t"/>
+          <a:lstStyle/>
+          <a:p>
+            <a:pPr indent="0" marL="0">
+              <a:buNone/>
+            </a:pPr>
+            <a:r>
+              <a:rPr lang="en-US" sz="900" dirty="0">
+                <a:solidFill>
+                  <a:srgbClr val="6B7A8F"/>
+                </a:solidFill>
+                <a:latin typeface="Malgun Gothic" pitchFamily="34" charset="0"/>
+                <a:ea typeface="Malgun Gothic" pitchFamily="34" charset="-122"/>
+                <a:cs typeface="Malgun Gothic" pitchFamily="34" charset="-120"/>
+              </a:rPr>
+              <a:t>해석한 80점 결과의 가중평균</a:t>
+            </a:r>
+            <a:endParaRPr lang="en-US" sz="900" dirty="0"/>
+          </a:p>
+        </p:txBody>
+      </p:sp>
+      <p:pic>
+        <p:nvPicPr>
+          <p:cNvPr id="15" name="Image 2" descr="/home/user/dddd/식/eq3a.png">    </p:cNvPr>
+          <p:cNvPicPr>
+            <a:picLocks noChangeAspect="1"/>
+          </p:cNvPicPr>
+          <p:nvPr/>
+        </p:nvPicPr>
+        <p:blipFill>
+          <a:blip r:embed="rId3"/>
+          <a:stretch>
+            <a:fillRect/>
+          </a:stretch>
+        </p:blipFill>
+        <p:spPr>
+          <a:xfrm>
+            <a:off x="4014216" y="3374136"/>
+            <a:ext cx="1778264" cy="257007"/>
+          </a:xfrm>
+          <a:prstGeom prst="rect">
+            <a:avLst/>
+          </a:prstGeom>
+        </p:spPr>
+      </p:pic>
+      <p:sp>
+        <p:nvSpPr>
+          <p:cNvPr id="16" name="Text 11"/>
+          <p:cNvSpPr txBox="1"/>
+          <p:nvPr/>
+        </p:nvSpPr>
+        <p:spPr>
+          <a:xfrm>
+            <a:off x="813816" y="4306824"/>
+            <a:ext cx="2926080" cy="274320"/>
+          </a:xfrm>
+          <a:prstGeom prst="rect">
+            <a:avLst/>
+          </a:prstGeom>
+          <a:noFill/>
+          <a:ln/>
+        </p:spPr>
+        <p:txBody>
+          <a:bodyPr wrap="square" lIns="0" tIns="0" rIns="0" bIns="0" rtlCol="0" anchor="ctr"/>
+          <a:lstStyle/>
+          <a:p>
+            <a:pPr indent="0" marL="0">
+              <a:buNone/>
+            </a:pPr>
+            <a:r>
+              <a:rPr lang="en-US" sz="1100" b="1" dirty="0">
+                <a:solidFill>
+                  <a:srgbClr val="16305B"/>
+                </a:solidFill>
+                <a:latin typeface="Malgun Gothic" pitchFamily="34" charset="0"/>
+                <a:ea typeface="Malgun Gothic" pitchFamily="34" charset="-122"/>
+                <a:cs typeface="Malgun Gothic" pitchFamily="34" charset="-120"/>
+              </a:rPr>
+              <a:t>예측 분산 (불확실성)</a:t>
+            </a:r>
+            <a:endParaRPr lang="en-US" sz="1100" dirty="0"/>
+          </a:p>
+        </p:txBody>
+      </p:sp>
+      <p:sp>
+        <p:nvSpPr>
+          <p:cNvPr id="17" name="Text 12"/>
+          <p:cNvSpPr txBox="1"/>
+          <p:nvPr/>
+        </p:nvSpPr>
+        <p:spPr>
+          <a:xfrm>
+            <a:off x="813816" y="4599432"/>
+            <a:ext cx="2926080" cy="457200"/>
+          </a:xfrm>
+          <a:prstGeom prst="rect">
+            <a:avLst/>
+          </a:prstGeom>
+          <a:noFill/>
+          <a:ln/>
+        </p:spPr>
+        <p:txBody>
+          <a:bodyPr wrap="square" lIns="0" tIns="0" rIns="0" bIns="0" rtlCol="0" anchor="t"/>
+          <a:lstStyle/>
+          <a:p>
+            <a:pPr indent="0" marL="0">
+              <a:buNone/>
+            </a:pPr>
+            <a:r>
+              <a:rPr lang="en-US" sz="900" dirty="0">
+                <a:solidFill>
+                  <a:srgbClr val="6B7A8F"/>
+                </a:solidFill>
+                <a:latin typeface="Malgun Gothic" pitchFamily="34" charset="0"/>
+                <a:ea typeface="Malgun Gothic" pitchFamily="34" charset="-122"/>
+                <a:cs typeface="Malgun Gothic" pitchFamily="34" charset="-120"/>
+              </a:rPr>
+              <a:t>해석점에서 멀수록 커짐</a:t>
+            </a:r>
+            <a:endParaRPr lang="en-US" sz="900" dirty="0"/>
+          </a:p>
+        </p:txBody>
+      </p:sp>
+      <p:pic>
+        <p:nvPicPr>
+          <p:cNvPr id="18" name="Image 3" descr="/home/user/dddd/식/eq3b.png">    </p:cNvPr>
+          <p:cNvPicPr>
+            <a:picLocks noChangeAspect="1"/>
+          </p:cNvPicPr>
+          <p:nvPr/>
+        </p:nvPicPr>
+        <p:blipFill>
+          <a:blip r:embed="rId4"/>
+          <a:stretch>
+            <a:fillRect/>
+          </a:stretch>
+        </p:blipFill>
+        <p:spPr>
+          <a:xfrm>
+            <a:off x="4014216" y="4306824"/>
+            <a:ext cx="2828971" cy="257007"/>
+          </a:xfrm>
+          <a:prstGeom prst="rect">
+            <a:avLst/>
+          </a:prstGeom>
+        </p:spPr>
+      </p:pic>
+      <p:sp>
+        <p:nvSpPr>
+          <p:cNvPr id="19" name="Text 13"/>
+          <p:cNvSpPr txBox="1"/>
+          <p:nvPr/>
+        </p:nvSpPr>
+        <p:spPr>
+          <a:xfrm>
+            <a:off x="813816" y="5239512"/>
+            <a:ext cx="2926080" cy="274320"/>
+          </a:xfrm>
+          <a:prstGeom prst="rect">
+            <a:avLst/>
+          </a:prstGeom>
+          <a:noFill/>
+          <a:ln/>
+        </p:spPr>
+        <p:txBody>
+          <a:bodyPr wrap="square" lIns="0" tIns="0" rIns="0" bIns="0" rtlCol="0" anchor="ctr"/>
+          <a:lstStyle/>
+          <a:p>
+            <a:pPr indent="0" marL="0">
+              <a:buNone/>
+            </a:pPr>
+            <a:r>
+              <a:rPr lang="en-US" sz="1100" b="1" dirty="0">
+                <a:solidFill>
+                  <a:srgbClr val="16305B"/>
+                </a:solidFill>
+                <a:latin typeface="Malgun Gothic" pitchFamily="34" charset="0"/>
+                <a:ea typeface="Malgun Gothic" pitchFamily="34" charset="-122"/>
+                <a:cs typeface="Malgun Gothic" pitchFamily="34" charset="-120"/>
+              </a:rPr>
+              <a:t>학습 — 로그 우도 최대화</a:t>
+            </a:r>
+            <a:endParaRPr lang="en-US" sz="1100" dirty="0"/>
+          </a:p>
+        </p:txBody>
+      </p:sp>
+      <p:sp>
+        <p:nvSpPr>
+          <p:cNvPr id="20" name="Text 14"/>
+          <p:cNvSpPr txBox="1"/>
+          <p:nvPr/>
+        </p:nvSpPr>
+        <p:spPr>
+          <a:xfrm>
+            <a:off x="813816" y="5532120"/>
+            <a:ext cx="2926080" cy="457200"/>
+          </a:xfrm>
+          <a:prstGeom prst="rect">
+            <a:avLst/>
+          </a:prstGeom>
+          <a:noFill/>
+          <a:ln/>
+        </p:spPr>
+        <p:txBody>
+          <a:bodyPr wrap="square" lIns="0" tIns="0" rIns="0" bIns="0" rtlCol="0" anchor="t"/>
+          <a:lstStyle/>
+          <a:p>
+            <a:pPr indent="0" marL="0">
+              <a:buNone/>
+            </a:pPr>
+            <a:r>
+              <a:rPr lang="en-US" sz="900" dirty="0">
+                <a:solidFill>
+                  <a:srgbClr val="6B7A8F"/>
+                </a:solidFill>
+                <a:latin typeface="Malgun Gothic" pitchFamily="34" charset="0"/>
+                <a:ea typeface="Malgun Gothic" pitchFamily="34" charset="-122"/>
+                <a:cs typeface="Malgun Gothic" pitchFamily="34" charset="-120"/>
+              </a:rPr>
+              <a:t>θ = {σ_f, ℓ₁~ℓ₈, σ_n}를 이 값이 최대가 되도록 결정</a:t>
+            </a:r>
+            <a:endParaRPr lang="en-US" sz="900" dirty="0"/>
+          </a:p>
+        </p:txBody>
+      </p:sp>
+      <p:pic>
+        <p:nvPicPr>
+          <p:cNvPr id="21" name="Image 4" descr="/home/user/dddd/식/eq4.png">    </p:cNvPr>
+          <p:cNvPicPr>
+            <a:picLocks noChangeAspect="1"/>
+          </p:cNvPicPr>
+          <p:nvPr/>
+        </p:nvPicPr>
+        <p:blipFill>
+          <a:blip r:embed="rId5"/>
+          <a:stretch>
+            <a:fillRect/>
+          </a:stretch>
+        </p:blipFill>
+        <p:spPr>
+          <a:xfrm>
+            <a:off x="4014216" y="5239512"/>
+            <a:ext cx="4006291" cy="236220"/>
+          </a:xfrm>
+          <a:prstGeom prst="rect">
+            <a:avLst/>
+          </a:prstGeom>
+        </p:spPr>
+      </p:pic>
     </p:spTree>
   </p:cSld>
   <p:clrMapOvr>

--- a/GPR_장표.pptx
+++ b/GPR_장표.pptx
@@ -2886,7 +2886,7 @@
         <p:spPr>
           <a:xfrm>
             <a:off x="6647688" y="3326587"/>
-            <a:ext cx="4846320" cy="237744"/>
+            <a:ext cx="4846320" cy="365760"/>
           </a:xfrm>
           <a:prstGeom prst="rect">
             <a:avLst/>
@@ -2913,7 +2913,27 @@
                 <a:ea typeface="Malgun Gothic" pitchFamily="34" charset="-122"/>
                 <a:cs typeface="Malgun Gothic" pitchFamily="34" charset="-120"/>
               </a:rPr>
-              <a:t>y: 해석 결과  ·  f: 설계에 따라 매끄럽게 변하는 성능  ·  ε: 작은 수치 오차 (크기 σ_n²)</a:t>
+              <a:t>y: 해석 결과  ·  f: 설계에 따라 매끄럽게 변하는 성능  ·  ε: 작은 수치 오차</a:t>
+            </a:r>
+            <a:endParaRPr lang="en-US" sz="880" dirty="0"/>
+          </a:p>
+          <a:p>
+            <a:pPr indent="0" marL="0">
+              <a:lnSpc>
+                <a:spcPct val="115000"/>
+              </a:lnSpc>
+              <a:buNone/>
+            </a:pPr>
+            <a:r>
+              <a:rPr lang="en-US" sz="880" dirty="0">
+                <a:solidFill>
+                  <a:srgbClr val="6B7A8F"/>
+                </a:solidFill>
+                <a:latin typeface="Malgun Gothic" pitchFamily="34" charset="0"/>
+                <a:ea typeface="Malgun Gothic" pitchFamily="34" charset="-122"/>
+                <a:cs typeface="Malgun Gothic" pitchFamily="34" charset="-120"/>
+              </a:rPr>
+              <a:t>σ_n²: 오차의 크기 (메시 · 수렴 차이로 생기는 흔들림), 학습으로 자동 결정</a:t>
             </a:r>
             <a:endParaRPr lang="en-US" sz="880" dirty="0"/>
           </a:p>
@@ -2927,7 +2947,7 @@
         </p:nvSpPr>
         <p:spPr>
           <a:xfrm>
-            <a:off x="6647688" y="3657600"/>
+            <a:off x="6647688" y="3785616"/>
             <a:ext cx="4846320" cy="237744"/>
           </a:xfrm>
           <a:prstGeom prst="rect">
@@ -2974,8 +2994,8 @@
         </p:blipFill>
         <p:spPr>
           <a:xfrm>
-            <a:off x="6739128" y="3913632"/>
-            <a:ext cx="3966606" cy="538582"/>
+            <a:off x="6739128" y="4023360"/>
+            <a:ext cx="3838651" cy="521208"/>
           </a:xfrm>
           <a:prstGeom prst="rect">
             <a:avLst/>
@@ -2990,7 +3010,7 @@
         </p:nvSpPr>
         <p:spPr>
           <a:xfrm>
-            <a:off x="6647688" y="4479646"/>
+            <a:off x="6647688" y="4562856"/>
             <a:ext cx="4846320" cy="365760"/>
           </a:xfrm>
           <a:prstGeom prst="rect">
@@ -3032,7 +3052,7 @@
         </p:nvSpPr>
         <p:spPr>
           <a:xfrm>
-            <a:off x="6647688" y="4937760"/>
+            <a:off x="6647688" y="5029200"/>
             <a:ext cx="4846320" cy="237744"/>
           </a:xfrm>
           <a:prstGeom prst="rect">
@@ -3079,7 +3099,7 @@
         </p:blipFill>
         <p:spPr>
           <a:xfrm>
-            <a:off x="6739128" y="5193792"/>
+            <a:off x="6739128" y="5276088"/>
             <a:ext cx="3877056" cy="228600"/>
           </a:xfrm>
           <a:prstGeom prst="rect">
@@ -3095,7 +3115,7 @@
         </p:nvSpPr>
         <p:spPr>
           <a:xfrm>
-            <a:off x="6647688" y="5449824"/>
+            <a:off x="6647688" y="5522976"/>
             <a:ext cx="4846320" cy="365760"/>
           </a:xfrm>
           <a:prstGeom prst="rect">

--- a/GPR_장표.pptx
+++ b/GPR_장표.pptx
@@ -6,9 +6,10 @@
   </p:sldMasterIdLst>
   <p:sldIdLst>
     <p:sldId id="256" r:id="rId2"/>
+    <p:sldId id="257" r:id="rId3"/>
   </p:sldIdLst>
   <p:notesMasterIdLst>
-    <p:notesMasterId r:id="rId3"/>
+    <p:notesMasterId r:id="rId4"/>
   </p:notesMasterIdLst>
   <p:sldSz cx="12192000" cy="6858000"/>
   <p:notesSz cx="6858000" cy="12192000"/>
@@ -526,6 +527,94 @@
             <a:fld id="{F7021451-1387-4CA6-816F-3879F97B5CBC}" type="slidenum">
               <a:rPr lang="en-US"/>
               <a:t>1</a:t>
+            </a:fld>
+            <a:endParaRPr lang="en-US"/>
+          </a:p>
+        </p:txBody>
+      </p:sp>
+    </p:spTree>
+    <p:extLst>
+      <p:ext uri="{BB962C8B-B14F-4D97-AF65-F5344CB8AC3E}">
+        <p14:creationId xmlns:p14="http://schemas.microsoft.com/office/powerpoint/2010/main" val="1024086991"/>
+      </p:ext>
+    </p:extLst>
+  </p:cSld>
+  <p:clrMapOvr>
+    <a:masterClrMapping/>
+  </p:clrMapOvr>
+</p:notes>
+</file>
+
+<file path=ppt/notesSlides/notesSlide2.xml><?xml version="1.0" encoding="utf-8"?>
+<p:notes xmlns:a="http://schemas.openxmlformats.org/drawingml/2006/main" xmlns:r="http://schemas.openxmlformats.org/officeDocument/2006/relationships" xmlns:p="http://schemas.openxmlformats.org/presentationml/2006/main">
+  <p:cSld>
+    <p:spTree>
+      <p:nvGrpSpPr>
+        <p:cNvPr id="1" name=""/>
+        <p:cNvGrpSpPr/>
+        <p:nvPr/>
+      </p:nvGrpSpPr>
+      <p:grpSpPr>
+        <a:xfrm>
+          <a:off x="0" y="0"/>
+          <a:ext cx="0" cy="0"/>
+          <a:chOff x="0" y="0"/>
+          <a:chExt cx="0" cy="0"/>
+        </a:xfrm>
+      </p:grpSpPr>
+      <p:sp>
+        <p:nvSpPr>
+          <p:cNvPr id="2" name="Slide Image Placeholder 1"/>
+          <p:cNvSpPr>
+            <a:spLocks noGrp="1" noRot="1" noChangeAspect="1"/>
+          </p:cNvSpPr>
+          <p:nvPr>
+            <p:ph type="sldImg"/>
+          </p:nvPr>
+        </p:nvSpPr>
+        <p:spPr/>
+      </p:sp>
+      <p:sp>
+        <p:nvSpPr>
+          <p:cNvPr id="3" name="Notes Placeholder 2"/>
+          <p:cNvSpPr>
+            <a:spLocks noGrp="1"/>
+          </p:cNvSpPr>
+          <p:nvPr>
+            <p:ph type="body" idx="1"/>
+          </p:nvPr>
+        </p:nvSpPr>
+        <p:spPr/>
+        <p:txBody>
+          <a:bodyPr/>
+          <a:lstStyle/>
+          <a:p>
+            <a:r>
+              <a:rPr lang="en-US" dirty="0"/>
+              <a:t/>
+            </a:r>
+            <a:endParaRPr lang="en-US" dirty="0"/>
+          </a:p>
+        </p:txBody>
+      </p:sp>
+      <p:sp>
+        <p:nvSpPr>
+          <p:cNvPr id="4" name="Slide Number Placeholder 3"/>
+          <p:cNvSpPr>
+            <a:spLocks noGrp="1"/>
+          </p:cNvSpPr>
+          <p:nvPr>
+            <p:ph type="sldNum" sz="quarter" idx="10"/>
+          </p:nvPr>
+        </p:nvSpPr>
+        <p:spPr/>
+        <p:txBody>
+          <a:bodyPr/>
+          <a:lstStyle/>
+          <a:p>
+            <a:fld id="{F7021451-1387-4CA6-816F-3879F97B5CBC}" type="slidenum">
+              <a:rPr lang="en-US"/>
+              <a:t>2</a:t>
             </a:fld>
             <a:endParaRPr lang="en-US"/>
           </a:p>
@@ -3157,6 +3246,1254 @@
 </p:sld>
 </file>
 
+<file path=ppt/slides/slide2.xml><?xml version="1.0" encoding="utf-8"?>
+<p:sld xmlns:a="http://schemas.openxmlformats.org/drawingml/2006/main" xmlns:r="http://schemas.openxmlformats.org/officeDocument/2006/relationships" xmlns:p="http://schemas.openxmlformats.org/presentationml/2006/main">
+  <p:cSld name="Slide 2">
+    <p:bg>
+      <p:bgPr>
+        <a:solidFill>
+          <a:srgbClr val="F3F5F8"/>
+        </a:solidFill>
+      </p:bgPr>
+    </p:bg>
+    <p:spTree>
+      <p:nvGrpSpPr>
+        <p:cNvPr id="1" name=""/>
+        <p:cNvGrpSpPr/>
+        <p:nvPr/>
+      </p:nvGrpSpPr>
+      <p:grpSpPr>
+        <a:xfrm>
+          <a:off x="0" y="0"/>
+          <a:ext cx="0" cy="0"/>
+          <a:chOff x="0" y="0"/>
+          <a:chExt cx="0" cy="0"/>
+        </a:xfrm>
+      </p:grpSpPr>
+      <p:sp>
+        <p:nvSpPr>
+          <p:cNvPr id="2" name="Shape 0"/>
+          <p:cNvSpPr/>
+          <p:nvPr/>
+        </p:nvSpPr>
+        <p:spPr>
+          <a:xfrm>
+            <a:off x="502920" y="384048"/>
+            <a:ext cx="475488" cy="475488"/>
+          </a:xfrm>
+          <a:prstGeom prst="rect">
+            <a:avLst/>
+          </a:prstGeom>
+          <a:solidFill>
+            <a:srgbClr val="16305B"/>
+          </a:solidFill>
+          <a:ln w="12700">
+            <a:solidFill>
+              <a:srgbClr val="16305B"/>
+            </a:solidFill>
+            <a:prstDash val="solid"/>
+          </a:ln>
+        </p:spPr>
+      </p:sp>
+      <p:sp>
+        <p:nvSpPr>
+          <p:cNvPr id="3" name="Text 1"/>
+          <p:cNvSpPr txBox="1"/>
+          <p:nvPr/>
+        </p:nvSpPr>
+        <p:spPr>
+          <a:xfrm>
+            <a:off x="502920" y="384048"/>
+            <a:ext cx="475488" cy="475488"/>
+          </a:xfrm>
+          <a:prstGeom prst="rect">
+            <a:avLst/>
+          </a:prstGeom>
+          <a:noFill/>
+          <a:ln/>
+        </p:spPr>
+        <p:txBody>
+          <a:bodyPr wrap="square" lIns="0" tIns="0" rIns="0" bIns="0" rtlCol="0" anchor="ctr"/>
+          <a:lstStyle/>
+          <a:p>
+            <a:pPr algn="ctr" indent="0" marL="0">
+              <a:buNone/>
+            </a:pPr>
+            <a:r>
+              <a:rPr lang="en-US" sz="1600" b="1" dirty="0">
+                <a:solidFill>
+                  <a:srgbClr val="FFFFFF"/>
+                </a:solidFill>
+                <a:latin typeface="Malgun Gothic" pitchFamily="34" charset="0"/>
+                <a:ea typeface="Malgun Gothic" pitchFamily="34" charset="-122"/>
+                <a:cs typeface="Malgun Gothic" pitchFamily="34" charset="-120"/>
+              </a:rPr>
+              <a:t>A</a:t>
+            </a:r>
+            <a:endParaRPr lang="en-US" sz="1600" dirty="0"/>
+          </a:p>
+        </p:txBody>
+      </p:sp>
+      <p:sp>
+        <p:nvSpPr>
+          <p:cNvPr id="4" name="Text 2"/>
+          <p:cNvSpPr txBox="1"/>
+          <p:nvPr/>
+        </p:nvSpPr>
+        <p:spPr>
+          <a:xfrm>
+            <a:off x="1124712" y="365760"/>
+            <a:ext cx="7315200" cy="237744"/>
+          </a:xfrm>
+          <a:prstGeom prst="rect">
+            <a:avLst/>
+          </a:prstGeom>
+          <a:noFill/>
+          <a:ln/>
+        </p:spPr>
+        <p:txBody>
+          <a:bodyPr wrap="square" lIns="0" tIns="0" rIns="0" bIns="0" rtlCol="0" anchor="ctr"/>
+          <a:lstStyle/>
+          <a:p>
+            <a:pPr indent="0" marL="0">
+              <a:buNone/>
+            </a:pPr>
+            <a:r>
+              <a:rPr lang="en-US" sz="1050" b="1" spc="100" kern="0" dirty="0">
+                <a:solidFill>
+                  <a:srgbClr val="00A3C4"/>
+                </a:solidFill>
+                <a:latin typeface="Malgun Gothic" pitchFamily="34" charset="0"/>
+                <a:ea typeface="Malgun Gothic" pitchFamily="34" charset="-122"/>
+                <a:cs typeface="Malgun Gothic" pitchFamily="34" charset="-120"/>
+              </a:rPr>
+              <a:t>부록</a:t>
+            </a:r>
+            <a:endParaRPr lang="en-US" sz="1050" dirty="0"/>
+          </a:p>
+        </p:txBody>
+      </p:sp>
+      <p:sp>
+        <p:nvSpPr>
+          <p:cNvPr id="5" name="Text 3"/>
+          <p:cNvSpPr txBox="1"/>
+          <p:nvPr/>
+        </p:nvSpPr>
+        <p:spPr>
+          <a:xfrm>
+            <a:off x="1124712" y="548640"/>
+            <a:ext cx="10607040" cy="384048"/>
+          </a:xfrm>
+          <a:prstGeom prst="rect">
+            <a:avLst/>
+          </a:prstGeom>
+          <a:noFill/>
+          <a:ln/>
+        </p:spPr>
+        <p:txBody>
+          <a:bodyPr wrap="square" lIns="0" tIns="0" rIns="0" bIns="0" rtlCol="0" anchor="ctr"/>
+          <a:lstStyle/>
+          <a:p>
+            <a:pPr indent="0" marL="0">
+              <a:buNone/>
+            </a:pPr>
+            <a:r>
+              <a:rPr lang="en-US" sz="2200" b="1" dirty="0">
+                <a:solidFill>
+                  <a:srgbClr val="16305B"/>
+                </a:solidFill>
+                <a:latin typeface="Malgun Gothic" pitchFamily="34" charset="0"/>
+                <a:ea typeface="Malgun Gothic" pitchFamily="34" charset="-122"/>
+                <a:cs typeface="Malgun Gothic" pitchFamily="34" charset="-120"/>
+              </a:rPr>
+              <a:t>GPR 식이 시사하는 바</a:t>
+            </a:r>
+            <a:endParaRPr lang="en-US" sz="2200" dirty="0"/>
+          </a:p>
+        </p:txBody>
+      </p:sp>
+      <p:sp>
+        <p:nvSpPr>
+          <p:cNvPr id="6" name="Shape 4"/>
+          <p:cNvSpPr/>
+          <p:nvPr/>
+        </p:nvSpPr>
+        <p:spPr>
+          <a:xfrm>
+            <a:off x="502920" y="1143000"/>
+            <a:ext cx="11183112" cy="896112"/>
+          </a:xfrm>
+          <a:prstGeom prst="roundRect">
+            <a:avLst>
+              <a:gd name="adj" fmla="val 6122"/>
+            </a:avLst>
+          </a:prstGeom>
+          <a:solidFill>
+            <a:srgbClr val="FFFFFF"/>
+          </a:solidFill>
+          <a:ln w="9525">
+            <a:solidFill>
+              <a:srgbClr val="DDE3EB"/>
+            </a:solidFill>
+            <a:prstDash val="solid"/>
+          </a:ln>
+          <a:effectLst>
+            <a:outerShdw sx="100000" sy="100000" kx="0" ky="0" algn="bl" rotWithShape="0" blurRad="101600" dist="12700" dir="5400000">
+              <a:srgbClr val="9AA8BC">
+                <a:alpha val="18000"/>
+              </a:srgbClr>
+            </a:outerShdw>
+          </a:effectLst>
+        </p:spPr>
+      </p:sp>
+      <p:sp>
+        <p:nvSpPr>
+          <p:cNvPr id="7" name="Shape 5"/>
+          <p:cNvSpPr/>
+          <p:nvPr/>
+        </p:nvSpPr>
+        <p:spPr>
+          <a:xfrm>
+            <a:off x="502920" y="1143000"/>
+            <a:ext cx="73152" cy="896112"/>
+          </a:xfrm>
+          <a:prstGeom prst="rect">
+            <a:avLst/>
+          </a:prstGeom>
+          <a:solidFill>
+            <a:srgbClr val="16305B"/>
+          </a:solidFill>
+          <a:ln w="12700">
+            <a:solidFill>
+              <a:srgbClr val="16305B"/>
+            </a:solidFill>
+            <a:prstDash val="solid"/>
+          </a:ln>
+        </p:spPr>
+      </p:sp>
+      <p:sp>
+        <p:nvSpPr>
+          <p:cNvPr id="8" name="Text 6"/>
+          <p:cNvSpPr txBox="1"/>
+          <p:nvPr/>
+        </p:nvSpPr>
+        <p:spPr>
+          <a:xfrm>
+            <a:off x="777240" y="1234440"/>
+            <a:ext cx="1371600" cy="274320"/>
+          </a:xfrm>
+          <a:prstGeom prst="rect">
+            <a:avLst/>
+          </a:prstGeom>
+          <a:noFill/>
+          <a:ln/>
+        </p:spPr>
+        <p:txBody>
+          <a:bodyPr wrap="square" lIns="0" tIns="0" rIns="0" bIns="0" rtlCol="0" anchor="ctr"/>
+          <a:lstStyle/>
+          <a:p>
+            <a:pPr indent="0" marL="0">
+              <a:buNone/>
+            </a:pPr>
+            <a:r>
+              <a:rPr lang="en-US" sz="1100" b="1" dirty="0">
+                <a:solidFill>
+                  <a:srgbClr val="16305B"/>
+                </a:solidFill>
+                <a:latin typeface="Malgun Gothic" pitchFamily="34" charset="0"/>
+                <a:ea typeface="Malgun Gothic" pitchFamily="34" charset="-122"/>
+                <a:cs typeface="Malgun Gothic" pitchFamily="34" charset="-120"/>
+              </a:rPr>
+              <a:t>① 모델 가정</a:t>
+            </a:r>
+            <a:endParaRPr lang="en-US" sz="1100" dirty="0"/>
+          </a:p>
+        </p:txBody>
+      </p:sp>
+      <p:pic>
+        <p:nvPicPr>
+          <p:cNvPr id="9" name="Image 0" descr="/home/user/dddd/식/eq1.png">    </p:cNvPr>
+          <p:cNvPicPr>
+            <a:picLocks noChangeAspect="1"/>
+          </p:cNvPicPr>
+          <p:nvPr/>
+        </p:nvPicPr>
+        <p:blipFill>
+          <a:blip r:embed="rId1"/>
+          <a:stretch>
+            <a:fillRect/>
+          </a:stretch>
+        </p:blipFill>
+        <p:spPr>
+          <a:xfrm>
+            <a:off x="777240" y="1664208"/>
+            <a:ext cx="2775204" cy="182880"/>
+          </a:xfrm>
+          <a:prstGeom prst="rect">
+            <a:avLst/>
+          </a:prstGeom>
+        </p:spPr>
+      </p:pic>
+      <p:sp>
+        <p:nvSpPr>
+          <p:cNvPr id="10" name="Shape 7"/>
+          <p:cNvSpPr/>
+          <p:nvPr/>
+        </p:nvSpPr>
+        <p:spPr>
+          <a:xfrm>
+            <a:off x="5257800" y="1280160"/>
+            <a:ext cx="0" cy="621792"/>
+          </a:xfrm>
+          <a:prstGeom prst="line">
+            <a:avLst/>
+          </a:prstGeom>
+          <a:noFill/>
+          <a:ln w="9525">
+            <a:solidFill>
+              <a:srgbClr val="DDE3EB"/>
+            </a:solidFill>
+            <a:prstDash val="solid"/>
+          </a:ln>
+        </p:spPr>
+      </p:sp>
+      <p:sp>
+        <p:nvSpPr>
+          <p:cNvPr id="11" name="Text 8"/>
+          <p:cNvSpPr txBox="1"/>
+          <p:nvPr/>
+        </p:nvSpPr>
+        <p:spPr>
+          <a:xfrm>
+            <a:off x="5486400" y="1143000"/>
+            <a:ext cx="6035040" cy="896112"/>
+          </a:xfrm>
+          <a:prstGeom prst="rect">
+            <a:avLst/>
+          </a:prstGeom>
+          <a:noFill/>
+          <a:ln/>
+        </p:spPr>
+        <p:txBody>
+          <a:bodyPr wrap="square" lIns="0" tIns="0" rIns="0" bIns="0" rtlCol="0" anchor="ctr"/>
+          <a:lstStyle/>
+          <a:p>
+            <a:pPr indent="0" marL="0">
+              <a:lnSpc>
+                <a:spcPct val="130000"/>
+              </a:lnSpc>
+              <a:buNone/>
+            </a:pPr>
+            <a:r>
+              <a:rPr lang="en-US" sz="1100" b="1" dirty="0">
+                <a:solidFill>
+                  <a:srgbClr val="16305B"/>
+                </a:solidFill>
+                <a:latin typeface="Malgun Gothic" pitchFamily="34" charset="0"/>
+                <a:ea typeface="Malgun Gothic" pitchFamily="34" charset="-122"/>
+                <a:cs typeface="Malgun Gothic" pitchFamily="34" charset="-120"/>
+              </a:rPr>
+              <a:t>해석 결과는 진짜 성능에 아주 작은 오차가 섞인 것</a:t>
+            </a:r>
+            <a:endParaRPr lang="en-US" sz="1100" dirty="0"/>
+          </a:p>
+          <a:p>
+            <a:pPr indent="0" marL="0">
+              <a:lnSpc>
+                <a:spcPct val="130000"/>
+              </a:lnSpc>
+              <a:buNone/>
+            </a:pPr>
+            <a:r>
+              <a:rPr lang="en-US" sz="950" dirty="0">
+                <a:solidFill>
+                  <a:srgbClr val="1C2733"/>
+                </a:solidFill>
+                <a:latin typeface="Malgun Gothic" pitchFamily="34" charset="0"/>
+                <a:ea typeface="Malgun Gothic" pitchFamily="34" charset="-122"/>
+                <a:cs typeface="Malgun Gothic" pitchFamily="34" charset="-120"/>
+              </a:rPr>
+              <a:t>→ 해석점을 억지로 통과하지 않는 매끄러운 곡선 → 수치 오차(σ_n²)까지 외우지 않음</a:t>
+            </a:r>
+            <a:endParaRPr lang="en-US" sz="1100" dirty="0"/>
+          </a:p>
+        </p:txBody>
+      </p:sp>
+      <p:sp>
+        <p:nvSpPr>
+          <p:cNvPr id="12" name="Shape 9"/>
+          <p:cNvSpPr/>
+          <p:nvPr/>
+        </p:nvSpPr>
+        <p:spPr>
+          <a:xfrm>
+            <a:off x="502920" y="2112264"/>
+            <a:ext cx="11183112" cy="896112"/>
+          </a:xfrm>
+          <a:prstGeom prst="roundRect">
+            <a:avLst>
+              <a:gd name="adj" fmla="val 6122"/>
+            </a:avLst>
+          </a:prstGeom>
+          <a:solidFill>
+            <a:srgbClr val="FFFFFF"/>
+          </a:solidFill>
+          <a:ln w="9525">
+            <a:solidFill>
+              <a:srgbClr val="DDE3EB"/>
+            </a:solidFill>
+            <a:prstDash val="solid"/>
+          </a:ln>
+          <a:effectLst>
+            <a:outerShdw sx="100000" sy="100000" kx="0" ky="0" algn="bl" rotWithShape="0" blurRad="101600" dist="12700" dir="5400000">
+              <a:srgbClr val="9AA8BC">
+                <a:alpha val="18000"/>
+              </a:srgbClr>
+            </a:outerShdw>
+          </a:effectLst>
+        </p:spPr>
+      </p:sp>
+      <p:sp>
+        <p:nvSpPr>
+          <p:cNvPr id="13" name="Shape 10"/>
+          <p:cNvSpPr/>
+          <p:nvPr/>
+        </p:nvSpPr>
+        <p:spPr>
+          <a:xfrm>
+            <a:off x="502920" y="2112264"/>
+            <a:ext cx="73152" cy="896112"/>
+          </a:xfrm>
+          <a:prstGeom prst="rect">
+            <a:avLst/>
+          </a:prstGeom>
+          <a:solidFill>
+            <a:srgbClr val="16305B"/>
+          </a:solidFill>
+          <a:ln w="12700">
+            <a:solidFill>
+              <a:srgbClr val="16305B"/>
+            </a:solidFill>
+            <a:prstDash val="solid"/>
+          </a:ln>
+        </p:spPr>
+      </p:sp>
+      <p:sp>
+        <p:nvSpPr>
+          <p:cNvPr id="14" name="Text 11"/>
+          <p:cNvSpPr txBox="1"/>
+          <p:nvPr/>
+        </p:nvSpPr>
+        <p:spPr>
+          <a:xfrm>
+            <a:off x="777240" y="2203704"/>
+            <a:ext cx="1371600" cy="274320"/>
+          </a:xfrm>
+          <a:prstGeom prst="rect">
+            <a:avLst/>
+          </a:prstGeom>
+          <a:noFill/>
+          <a:ln/>
+        </p:spPr>
+        <p:txBody>
+          <a:bodyPr wrap="square" lIns="0" tIns="0" rIns="0" bIns="0" rtlCol="0" anchor="ctr"/>
+          <a:lstStyle/>
+          <a:p>
+            <a:pPr indent="0" marL="0">
+              <a:buNone/>
+            </a:pPr>
+            <a:r>
+              <a:rPr lang="en-US" sz="1100" b="1" dirty="0">
+                <a:solidFill>
+                  <a:srgbClr val="16305B"/>
+                </a:solidFill>
+                <a:latin typeface="Malgun Gothic" pitchFamily="34" charset="0"/>
+                <a:ea typeface="Malgun Gothic" pitchFamily="34" charset="-122"/>
+                <a:cs typeface="Malgun Gothic" pitchFamily="34" charset="-120"/>
+              </a:rPr>
+              <a:t>② 커널</a:t>
+            </a:r>
+            <a:endParaRPr lang="en-US" sz="1100" dirty="0"/>
+          </a:p>
+        </p:txBody>
+      </p:sp>
+      <p:pic>
+        <p:nvPicPr>
+          <p:cNvPr id="15" name="Image 1" descr="/home/user/dddd/식/eq2.png">    </p:cNvPr>
+          <p:cNvPicPr>
+            <a:picLocks noChangeAspect="1"/>
+          </p:cNvPicPr>
+          <p:nvPr/>
+        </p:nvPicPr>
+        <p:blipFill>
+          <a:blip r:embed="rId2"/>
+          <a:stretch>
+            <a:fillRect/>
+          </a:stretch>
+        </p:blipFill>
+        <p:spPr>
+          <a:xfrm>
+            <a:off x="777240" y="2507742"/>
+            <a:ext cx="3198876" cy="434340"/>
+          </a:xfrm>
+          <a:prstGeom prst="rect">
+            <a:avLst/>
+          </a:prstGeom>
+        </p:spPr>
+      </p:pic>
+      <p:sp>
+        <p:nvSpPr>
+          <p:cNvPr id="16" name="Shape 12"/>
+          <p:cNvSpPr/>
+          <p:nvPr/>
+        </p:nvSpPr>
+        <p:spPr>
+          <a:xfrm>
+            <a:off x="5257800" y="2249424"/>
+            <a:ext cx="0" cy="621792"/>
+          </a:xfrm>
+          <a:prstGeom prst="line">
+            <a:avLst/>
+          </a:prstGeom>
+          <a:noFill/>
+          <a:ln w="9525">
+            <a:solidFill>
+              <a:srgbClr val="DDE3EB"/>
+            </a:solidFill>
+            <a:prstDash val="solid"/>
+          </a:ln>
+        </p:spPr>
+      </p:sp>
+      <p:sp>
+        <p:nvSpPr>
+          <p:cNvPr id="17" name="Text 13"/>
+          <p:cNvSpPr txBox="1"/>
+          <p:nvPr/>
+        </p:nvSpPr>
+        <p:spPr>
+          <a:xfrm>
+            <a:off x="5486400" y="2112264"/>
+            <a:ext cx="6035040" cy="896112"/>
+          </a:xfrm>
+          <a:prstGeom prst="rect">
+            <a:avLst/>
+          </a:prstGeom>
+          <a:noFill/>
+          <a:ln/>
+        </p:spPr>
+        <p:txBody>
+          <a:bodyPr wrap="square" lIns="0" tIns="0" rIns="0" bIns="0" rtlCol="0" anchor="ctr"/>
+          <a:lstStyle/>
+          <a:p>
+            <a:pPr indent="0" marL="0">
+              <a:lnSpc>
+                <a:spcPct val="130000"/>
+              </a:lnSpc>
+              <a:buNone/>
+            </a:pPr>
+            <a:r>
+              <a:rPr lang="en-US" sz="1100" b="1" dirty="0">
+                <a:solidFill>
+                  <a:srgbClr val="16305B"/>
+                </a:solidFill>
+                <a:latin typeface="Malgun Gothic" pitchFamily="34" charset="0"/>
+                <a:ea typeface="Malgun Gothic" pitchFamily="34" charset="-122"/>
+                <a:cs typeface="Malgun Gothic" pitchFamily="34" charset="-120"/>
+              </a:rPr>
+              <a:t>비슷한 설계는 비슷한 결과를 낸다</a:t>
+            </a:r>
+            <a:endParaRPr lang="en-US" sz="1100" dirty="0"/>
+          </a:p>
+          <a:p>
+            <a:pPr indent="0" marL="0">
+              <a:lnSpc>
+                <a:spcPct val="130000"/>
+              </a:lnSpc>
+              <a:buNone/>
+            </a:pPr>
+            <a:r>
+              <a:rPr lang="en-US" sz="950" dirty="0">
+                <a:solidFill>
+                  <a:srgbClr val="1C2733"/>
+                </a:solidFill>
+                <a:latin typeface="Malgun Gothic" pitchFamily="34" charset="0"/>
+                <a:ea typeface="Malgun Gothic" pitchFamily="34" charset="-122"/>
+                <a:cs typeface="Malgun Gothic" pitchFamily="34" charset="-120"/>
+              </a:rPr>
+              <a:t>→ 변수마다 눈금 ℓ_d를 학습 → 민감한 변수(ℓ 작음)를 모델이 스스로 찾음</a:t>
+            </a:r>
+            <a:endParaRPr lang="en-US" sz="1100" dirty="0"/>
+          </a:p>
+        </p:txBody>
+      </p:sp>
+      <p:sp>
+        <p:nvSpPr>
+          <p:cNvPr id="18" name="Shape 14"/>
+          <p:cNvSpPr/>
+          <p:nvPr/>
+        </p:nvSpPr>
+        <p:spPr>
+          <a:xfrm>
+            <a:off x="502920" y="3081528"/>
+            <a:ext cx="11183112" cy="896112"/>
+          </a:xfrm>
+          <a:prstGeom prst="roundRect">
+            <a:avLst>
+              <a:gd name="adj" fmla="val 6122"/>
+            </a:avLst>
+          </a:prstGeom>
+          <a:solidFill>
+            <a:srgbClr val="FFFFFF"/>
+          </a:solidFill>
+          <a:ln w="9525">
+            <a:solidFill>
+              <a:srgbClr val="DDE3EB"/>
+            </a:solidFill>
+            <a:prstDash val="solid"/>
+          </a:ln>
+          <a:effectLst>
+            <a:outerShdw sx="100000" sy="100000" kx="0" ky="0" algn="bl" rotWithShape="0" blurRad="101600" dist="12700" dir="5400000">
+              <a:srgbClr val="9AA8BC">
+                <a:alpha val="18000"/>
+              </a:srgbClr>
+            </a:outerShdw>
+          </a:effectLst>
+        </p:spPr>
+      </p:sp>
+      <p:sp>
+        <p:nvSpPr>
+          <p:cNvPr id="19" name="Shape 15"/>
+          <p:cNvSpPr/>
+          <p:nvPr/>
+        </p:nvSpPr>
+        <p:spPr>
+          <a:xfrm>
+            <a:off x="502920" y="3081528"/>
+            <a:ext cx="73152" cy="896112"/>
+          </a:xfrm>
+          <a:prstGeom prst="rect">
+            <a:avLst/>
+          </a:prstGeom>
+          <a:solidFill>
+            <a:srgbClr val="00A3C4"/>
+          </a:solidFill>
+          <a:ln w="12700">
+            <a:solidFill>
+              <a:srgbClr val="00A3C4"/>
+            </a:solidFill>
+            <a:prstDash val="solid"/>
+          </a:ln>
+        </p:spPr>
+      </p:sp>
+      <p:sp>
+        <p:nvSpPr>
+          <p:cNvPr id="20" name="Text 16"/>
+          <p:cNvSpPr txBox="1"/>
+          <p:nvPr/>
+        </p:nvSpPr>
+        <p:spPr>
+          <a:xfrm>
+            <a:off x="777240" y="3172968"/>
+            <a:ext cx="1371600" cy="274320"/>
+          </a:xfrm>
+          <a:prstGeom prst="rect">
+            <a:avLst/>
+          </a:prstGeom>
+          <a:noFill/>
+          <a:ln/>
+        </p:spPr>
+        <p:txBody>
+          <a:bodyPr wrap="square" lIns="0" tIns="0" rIns="0" bIns="0" rtlCol="0" anchor="ctr"/>
+          <a:lstStyle/>
+          <a:p>
+            <a:pPr indent="0" marL="0">
+              <a:buNone/>
+            </a:pPr>
+            <a:r>
+              <a:rPr lang="en-US" sz="1100" b="1" dirty="0">
+                <a:solidFill>
+                  <a:srgbClr val="16305B"/>
+                </a:solidFill>
+                <a:latin typeface="Malgun Gothic" pitchFamily="34" charset="0"/>
+                <a:ea typeface="Malgun Gothic" pitchFamily="34" charset="-122"/>
+                <a:cs typeface="Malgun Gothic" pitchFamily="34" charset="-120"/>
+              </a:rPr>
+              <a:t>③ 예측 평균</a:t>
+            </a:r>
+            <a:endParaRPr lang="en-US" sz="1100" dirty="0"/>
+          </a:p>
+        </p:txBody>
+      </p:sp>
+      <p:pic>
+        <p:nvPicPr>
+          <p:cNvPr id="21" name="Image 2" descr="/home/user/dddd/식/eq3a.png">    </p:cNvPr>
+          <p:cNvPicPr>
+            <a:picLocks noChangeAspect="1"/>
+          </p:cNvPicPr>
+          <p:nvPr/>
+        </p:nvPicPr>
+        <p:blipFill>
+          <a:blip r:embed="rId3"/>
+          <a:stretch>
+            <a:fillRect/>
+          </a:stretch>
+        </p:blipFill>
+        <p:spPr>
+          <a:xfrm>
+            <a:off x="777240" y="3590544"/>
+            <a:ext cx="1434084" cy="207264"/>
+          </a:xfrm>
+          <a:prstGeom prst="rect">
+            <a:avLst/>
+          </a:prstGeom>
+        </p:spPr>
+      </p:pic>
+      <p:sp>
+        <p:nvSpPr>
+          <p:cNvPr id="22" name="Shape 17"/>
+          <p:cNvSpPr/>
+          <p:nvPr/>
+        </p:nvSpPr>
+        <p:spPr>
+          <a:xfrm>
+            <a:off x="5257800" y="3218688"/>
+            <a:ext cx="0" cy="621792"/>
+          </a:xfrm>
+          <a:prstGeom prst="line">
+            <a:avLst/>
+          </a:prstGeom>
+          <a:noFill/>
+          <a:ln w="9525">
+            <a:solidFill>
+              <a:srgbClr val="DDE3EB"/>
+            </a:solidFill>
+            <a:prstDash val="solid"/>
+          </a:ln>
+        </p:spPr>
+      </p:sp>
+      <p:sp>
+        <p:nvSpPr>
+          <p:cNvPr id="23" name="Text 18"/>
+          <p:cNvSpPr txBox="1"/>
+          <p:nvPr/>
+        </p:nvSpPr>
+        <p:spPr>
+          <a:xfrm>
+            <a:off x="5486400" y="3081528"/>
+            <a:ext cx="6035040" cy="896112"/>
+          </a:xfrm>
+          <a:prstGeom prst="rect">
+            <a:avLst/>
+          </a:prstGeom>
+          <a:noFill/>
+          <a:ln/>
+        </p:spPr>
+        <p:txBody>
+          <a:bodyPr wrap="square" lIns="0" tIns="0" rIns="0" bIns="0" rtlCol="0" anchor="ctr"/>
+          <a:lstStyle/>
+          <a:p>
+            <a:pPr indent="0" marL="0">
+              <a:lnSpc>
+                <a:spcPct val="130000"/>
+              </a:lnSpc>
+              <a:buNone/>
+            </a:pPr>
+            <a:r>
+              <a:rPr lang="en-US" sz="1100" b="1" dirty="0">
+                <a:solidFill>
+                  <a:srgbClr val="16305B"/>
+                </a:solidFill>
+                <a:latin typeface="Malgun Gothic" pitchFamily="34" charset="0"/>
+                <a:ea typeface="Malgun Gothic" pitchFamily="34" charset="-122"/>
+                <a:cs typeface="Malgun Gothic" pitchFamily="34" charset="-120"/>
+              </a:rPr>
+              <a:t>새 설계 = 가까운 해석 결과를 많이 참고한 평균</a:t>
+            </a:r>
+            <a:endParaRPr lang="en-US" sz="1100" dirty="0"/>
+          </a:p>
+          <a:p>
+            <a:pPr indent="0" marL="0">
+              <a:lnSpc>
+                <a:spcPct val="130000"/>
+              </a:lnSpc>
+              <a:buNone/>
+            </a:pPr>
+            <a:r>
+              <a:rPr lang="en-US" sz="950" dirty="0">
+                <a:solidFill>
+                  <a:srgbClr val="1C2733"/>
+                </a:solidFill>
+                <a:latin typeface="Malgun Gothic" pitchFamily="34" charset="0"/>
+                <a:ea typeface="Malgun Gothic" pitchFamily="34" charset="-122"/>
+                <a:cs typeface="Malgun Gothic" pitchFamily="34" charset="-120"/>
+              </a:rPr>
+              <a:t>→ 해석 없이 80개 결과만으로 새 설계 성능을 수 초 만에 계산</a:t>
+            </a:r>
+            <a:endParaRPr lang="en-US" sz="1100" dirty="0"/>
+          </a:p>
+        </p:txBody>
+      </p:sp>
+      <p:sp>
+        <p:nvSpPr>
+          <p:cNvPr id="24" name="Shape 19"/>
+          <p:cNvSpPr/>
+          <p:nvPr/>
+        </p:nvSpPr>
+        <p:spPr>
+          <a:xfrm>
+            <a:off x="502920" y="4050792"/>
+            <a:ext cx="11183112" cy="896112"/>
+          </a:xfrm>
+          <a:prstGeom prst="roundRect">
+            <a:avLst>
+              <a:gd name="adj" fmla="val 6122"/>
+            </a:avLst>
+          </a:prstGeom>
+          <a:solidFill>
+            <a:srgbClr val="FFFFFF"/>
+          </a:solidFill>
+          <a:ln w="9525">
+            <a:solidFill>
+              <a:srgbClr val="DDE3EB"/>
+            </a:solidFill>
+            <a:prstDash val="solid"/>
+          </a:ln>
+          <a:effectLst>
+            <a:outerShdw sx="100000" sy="100000" kx="0" ky="0" algn="bl" rotWithShape="0" blurRad="101600" dist="12700" dir="5400000">
+              <a:srgbClr val="9AA8BC">
+                <a:alpha val="18000"/>
+              </a:srgbClr>
+            </a:outerShdw>
+          </a:effectLst>
+        </p:spPr>
+      </p:sp>
+      <p:sp>
+        <p:nvSpPr>
+          <p:cNvPr id="25" name="Shape 20"/>
+          <p:cNvSpPr/>
+          <p:nvPr/>
+        </p:nvSpPr>
+        <p:spPr>
+          <a:xfrm>
+            <a:off x="502920" y="4050792"/>
+            <a:ext cx="73152" cy="896112"/>
+          </a:xfrm>
+          <a:prstGeom prst="rect">
+            <a:avLst/>
+          </a:prstGeom>
+          <a:solidFill>
+            <a:srgbClr val="00A3C4"/>
+          </a:solidFill>
+          <a:ln w="12700">
+            <a:solidFill>
+              <a:srgbClr val="00A3C4"/>
+            </a:solidFill>
+            <a:prstDash val="solid"/>
+          </a:ln>
+        </p:spPr>
+      </p:sp>
+      <p:sp>
+        <p:nvSpPr>
+          <p:cNvPr id="26" name="Text 21"/>
+          <p:cNvSpPr txBox="1"/>
+          <p:nvPr/>
+        </p:nvSpPr>
+        <p:spPr>
+          <a:xfrm>
+            <a:off x="777240" y="4142232"/>
+            <a:ext cx="1371600" cy="274320"/>
+          </a:xfrm>
+          <a:prstGeom prst="rect">
+            <a:avLst/>
+          </a:prstGeom>
+          <a:noFill/>
+          <a:ln/>
+        </p:spPr>
+        <p:txBody>
+          <a:bodyPr wrap="square" lIns="0" tIns="0" rIns="0" bIns="0" rtlCol="0" anchor="ctr"/>
+          <a:lstStyle/>
+          <a:p>
+            <a:pPr indent="0" marL="0">
+              <a:buNone/>
+            </a:pPr>
+            <a:r>
+              <a:rPr lang="en-US" sz="1100" b="1" dirty="0">
+                <a:solidFill>
+                  <a:srgbClr val="16305B"/>
+                </a:solidFill>
+                <a:latin typeface="Malgun Gothic" pitchFamily="34" charset="0"/>
+                <a:ea typeface="Malgun Gothic" pitchFamily="34" charset="-122"/>
+                <a:cs typeface="Malgun Gothic" pitchFamily="34" charset="-120"/>
+              </a:rPr>
+              <a:t>④ 예측 분산</a:t>
+            </a:r>
+            <a:endParaRPr lang="en-US" sz="1100" dirty="0"/>
+          </a:p>
+        </p:txBody>
+      </p:sp>
+      <p:pic>
+        <p:nvPicPr>
+          <p:cNvPr id="27" name="Image 3" descr="/home/user/dddd/식/eq3b.png">    </p:cNvPr>
+          <p:cNvPicPr>
+            <a:picLocks noChangeAspect="1"/>
+          </p:cNvPicPr>
+          <p:nvPr/>
+        </p:nvPicPr>
+        <p:blipFill>
+          <a:blip r:embed="rId4"/>
+          <a:stretch>
+            <a:fillRect/>
+          </a:stretch>
+        </p:blipFill>
+        <p:spPr>
+          <a:xfrm>
+            <a:off x="777240" y="4559808"/>
+            <a:ext cx="2281428" cy="207264"/>
+          </a:xfrm>
+          <a:prstGeom prst="rect">
+            <a:avLst/>
+          </a:prstGeom>
+        </p:spPr>
+      </p:pic>
+      <p:sp>
+        <p:nvSpPr>
+          <p:cNvPr id="28" name="Shape 22"/>
+          <p:cNvSpPr/>
+          <p:nvPr/>
+        </p:nvSpPr>
+        <p:spPr>
+          <a:xfrm>
+            <a:off x="5257800" y="4187952"/>
+            <a:ext cx="0" cy="621792"/>
+          </a:xfrm>
+          <a:prstGeom prst="line">
+            <a:avLst/>
+          </a:prstGeom>
+          <a:noFill/>
+          <a:ln w="9525">
+            <a:solidFill>
+              <a:srgbClr val="DDE3EB"/>
+            </a:solidFill>
+            <a:prstDash val="solid"/>
+          </a:ln>
+        </p:spPr>
+      </p:sp>
+      <p:sp>
+        <p:nvSpPr>
+          <p:cNvPr id="29" name="Text 23"/>
+          <p:cNvSpPr txBox="1"/>
+          <p:nvPr/>
+        </p:nvSpPr>
+        <p:spPr>
+          <a:xfrm>
+            <a:off x="5486400" y="4050792"/>
+            <a:ext cx="6035040" cy="896112"/>
+          </a:xfrm>
+          <a:prstGeom prst="rect">
+            <a:avLst/>
+          </a:prstGeom>
+          <a:noFill/>
+          <a:ln/>
+        </p:spPr>
+        <p:txBody>
+          <a:bodyPr wrap="square" lIns="0" tIns="0" rIns="0" bIns="0" rtlCol="0" anchor="ctr"/>
+          <a:lstStyle/>
+          <a:p>
+            <a:pPr indent="0" marL="0">
+              <a:lnSpc>
+                <a:spcPct val="130000"/>
+              </a:lnSpc>
+              <a:buNone/>
+            </a:pPr>
+            <a:r>
+              <a:rPr lang="en-US" sz="1100" b="1" dirty="0">
+                <a:solidFill>
+                  <a:srgbClr val="16305B"/>
+                </a:solidFill>
+                <a:latin typeface="Malgun Gothic" pitchFamily="34" charset="0"/>
+                <a:ea typeface="Malgun Gothic" pitchFamily="34" charset="-122"/>
+                <a:cs typeface="Malgun Gothic" pitchFamily="34" charset="-120"/>
+              </a:rPr>
+              <a:t>근처에 해석점이 없으면 '모른다'고 말함</a:t>
+            </a:r>
+            <a:endParaRPr lang="en-US" sz="1100" dirty="0"/>
+          </a:p>
+          <a:p>
+            <a:pPr indent="0" marL="0">
+              <a:lnSpc>
+                <a:spcPct val="130000"/>
+              </a:lnSpc>
+              <a:buNone/>
+            </a:pPr>
+            <a:r>
+              <a:rPr lang="en-US" sz="950" dirty="0">
+                <a:solidFill>
+                  <a:srgbClr val="1C2733"/>
+                </a:solidFill>
+                <a:latin typeface="Malgun Gothic" pitchFamily="34" charset="0"/>
+                <a:ea typeface="Malgun Gothic" pitchFamily="34" charset="-122"/>
+                <a:cs typeface="Malgun Gothic" pitchFamily="34" charset="-120"/>
+              </a:rPr>
+              <a:t>→ 예측 신뢰도 확인 + 불확실성이 큰 곳을 다음 해석 위치로 선정</a:t>
+            </a:r>
+            <a:endParaRPr lang="en-US" sz="1100" dirty="0"/>
+          </a:p>
+        </p:txBody>
+      </p:sp>
+      <p:sp>
+        <p:nvSpPr>
+          <p:cNvPr id="30" name="Shape 24"/>
+          <p:cNvSpPr/>
+          <p:nvPr/>
+        </p:nvSpPr>
+        <p:spPr>
+          <a:xfrm>
+            <a:off x="502920" y="5020056"/>
+            <a:ext cx="11183112" cy="896112"/>
+          </a:xfrm>
+          <a:prstGeom prst="roundRect">
+            <a:avLst>
+              <a:gd name="adj" fmla="val 6122"/>
+            </a:avLst>
+          </a:prstGeom>
+          <a:solidFill>
+            <a:srgbClr val="FFFFFF"/>
+          </a:solidFill>
+          <a:ln w="9525">
+            <a:solidFill>
+              <a:srgbClr val="DDE3EB"/>
+            </a:solidFill>
+            <a:prstDash val="solid"/>
+          </a:ln>
+          <a:effectLst>
+            <a:outerShdw sx="100000" sy="100000" kx="0" ky="0" algn="bl" rotWithShape="0" blurRad="101600" dist="12700" dir="5400000">
+              <a:srgbClr val="9AA8BC">
+                <a:alpha val="18000"/>
+              </a:srgbClr>
+            </a:outerShdw>
+          </a:effectLst>
+        </p:spPr>
+      </p:sp>
+      <p:sp>
+        <p:nvSpPr>
+          <p:cNvPr id="31" name="Shape 25"/>
+          <p:cNvSpPr/>
+          <p:nvPr/>
+        </p:nvSpPr>
+        <p:spPr>
+          <a:xfrm>
+            <a:off x="502920" y="5020056"/>
+            <a:ext cx="73152" cy="896112"/>
+          </a:xfrm>
+          <a:prstGeom prst="rect">
+            <a:avLst/>
+          </a:prstGeom>
+          <a:solidFill>
+            <a:srgbClr val="00A3C4"/>
+          </a:solidFill>
+          <a:ln w="12700">
+            <a:solidFill>
+              <a:srgbClr val="00A3C4"/>
+            </a:solidFill>
+            <a:prstDash val="solid"/>
+          </a:ln>
+        </p:spPr>
+      </p:sp>
+      <p:sp>
+        <p:nvSpPr>
+          <p:cNvPr id="32" name="Text 26"/>
+          <p:cNvSpPr txBox="1"/>
+          <p:nvPr/>
+        </p:nvSpPr>
+        <p:spPr>
+          <a:xfrm>
+            <a:off x="777240" y="5111496"/>
+            <a:ext cx="1371600" cy="274320"/>
+          </a:xfrm>
+          <a:prstGeom prst="rect">
+            <a:avLst/>
+          </a:prstGeom>
+          <a:noFill/>
+          <a:ln/>
+        </p:spPr>
+        <p:txBody>
+          <a:bodyPr wrap="square" lIns="0" tIns="0" rIns="0" bIns="0" rtlCol="0" anchor="ctr"/>
+          <a:lstStyle/>
+          <a:p>
+            <a:pPr indent="0" marL="0">
+              <a:buNone/>
+            </a:pPr>
+            <a:r>
+              <a:rPr lang="en-US" sz="1100" b="1" dirty="0">
+                <a:solidFill>
+                  <a:srgbClr val="16305B"/>
+                </a:solidFill>
+                <a:latin typeface="Malgun Gothic" pitchFamily="34" charset="0"/>
+                <a:ea typeface="Malgun Gothic" pitchFamily="34" charset="-122"/>
+                <a:cs typeface="Malgun Gothic" pitchFamily="34" charset="-120"/>
+              </a:rPr>
+              <a:t>⑤ 학습</a:t>
+            </a:r>
+            <a:endParaRPr lang="en-US" sz="1100" dirty="0"/>
+          </a:p>
+        </p:txBody>
+      </p:sp>
+      <p:pic>
+        <p:nvPicPr>
+          <p:cNvPr id="33" name="Image 4" descr="/home/user/dddd/식/eq4.png">    </p:cNvPr>
+          <p:cNvPicPr>
+            <a:picLocks noChangeAspect="1"/>
+          </p:cNvPicPr>
+          <p:nvPr/>
+        </p:nvPicPr>
+        <p:blipFill>
+          <a:blip r:embed="rId5"/>
+          <a:stretch>
+            <a:fillRect/>
+          </a:stretch>
+        </p:blipFill>
+        <p:spPr>
+          <a:xfrm>
+            <a:off x="777240" y="5537454"/>
+            <a:ext cx="3230880" cy="190500"/>
+          </a:xfrm>
+          <a:prstGeom prst="rect">
+            <a:avLst/>
+          </a:prstGeom>
+        </p:spPr>
+      </p:pic>
+      <p:sp>
+        <p:nvSpPr>
+          <p:cNvPr id="34" name="Shape 27"/>
+          <p:cNvSpPr/>
+          <p:nvPr/>
+        </p:nvSpPr>
+        <p:spPr>
+          <a:xfrm>
+            <a:off x="5257800" y="5157216"/>
+            <a:ext cx="0" cy="621792"/>
+          </a:xfrm>
+          <a:prstGeom prst="line">
+            <a:avLst/>
+          </a:prstGeom>
+          <a:noFill/>
+          <a:ln w="9525">
+            <a:solidFill>
+              <a:srgbClr val="DDE3EB"/>
+            </a:solidFill>
+            <a:prstDash val="solid"/>
+          </a:ln>
+        </p:spPr>
+      </p:sp>
+      <p:sp>
+        <p:nvSpPr>
+          <p:cNvPr id="35" name="Text 28"/>
+          <p:cNvSpPr txBox="1"/>
+          <p:nvPr/>
+        </p:nvSpPr>
+        <p:spPr>
+          <a:xfrm>
+            <a:off x="5486400" y="5020056"/>
+            <a:ext cx="6035040" cy="896112"/>
+          </a:xfrm>
+          <a:prstGeom prst="rect">
+            <a:avLst/>
+          </a:prstGeom>
+          <a:noFill/>
+          <a:ln/>
+        </p:spPr>
+        <p:txBody>
+          <a:bodyPr wrap="square" lIns="0" tIns="0" rIns="0" bIns="0" rtlCol="0" anchor="ctr"/>
+          <a:lstStyle/>
+          <a:p>
+            <a:pPr indent="0" marL="0">
+              <a:lnSpc>
+                <a:spcPct val="130000"/>
+              </a:lnSpc>
+              <a:buNone/>
+            </a:pPr>
+            <a:r>
+              <a:rPr lang="en-US" sz="1100" b="1" dirty="0">
+                <a:solidFill>
+                  <a:srgbClr val="16305B"/>
+                </a:solidFill>
+                <a:latin typeface="Malgun Gothic" pitchFamily="34" charset="0"/>
+                <a:ea typeface="Malgun Gothic" pitchFamily="34" charset="-122"/>
+                <a:cs typeface="Malgun Gothic" pitchFamily="34" charset="-120"/>
+              </a:rPr>
+              <a:t>가진 데이터를 가장 잘 설명하는 설정을 자동 선택</a:t>
+            </a:r>
+            <a:endParaRPr lang="en-US" sz="1100" dirty="0"/>
+          </a:p>
+          <a:p>
+            <a:pPr indent="0" marL="0">
+              <a:lnSpc>
+                <a:spcPct val="130000"/>
+              </a:lnSpc>
+              <a:buNone/>
+            </a:pPr>
+            <a:r>
+              <a:rPr lang="en-US" sz="950" dirty="0">
+                <a:solidFill>
+                  <a:srgbClr val="1C2733"/>
+                </a:solidFill>
+                <a:latin typeface="Malgun Gothic" pitchFamily="34" charset="0"/>
+                <a:ea typeface="Malgun Gothic" pitchFamily="34" charset="-122"/>
+                <a:cs typeface="Malgun Gothic" pitchFamily="34" charset="-120"/>
+              </a:rPr>
+              <a:t>→ 너무 단순하지도 복잡하지도 않은 균형점을 데이터가 결정</a:t>
+            </a:r>
+            <a:endParaRPr lang="en-US" sz="1100" dirty="0"/>
+          </a:p>
+        </p:txBody>
+      </p:sp>
+      <p:sp>
+        <p:nvSpPr>
+          <p:cNvPr id="36" name="Text 29"/>
+          <p:cNvSpPr txBox="1"/>
+          <p:nvPr/>
+        </p:nvSpPr>
+        <p:spPr>
+          <a:xfrm>
+            <a:off x="502920" y="6053328"/>
+            <a:ext cx="11183112" cy="274320"/>
+          </a:xfrm>
+          <a:prstGeom prst="rect">
+            <a:avLst/>
+          </a:prstGeom>
+          <a:noFill/>
+          <a:ln/>
+        </p:spPr>
+        <p:txBody>
+          <a:bodyPr wrap="square" lIns="0" tIns="0" rIns="0" bIns="0" rtlCol="0" anchor="ctr"/>
+          <a:lstStyle/>
+          <a:p>
+            <a:pPr indent="0" marL="0">
+              <a:buNone/>
+            </a:pPr>
+            <a:r>
+              <a:rPr lang="en-US" sz="950" b="1" dirty="0">
+                <a:solidFill>
+                  <a:srgbClr val="0088A6"/>
+                </a:solidFill>
+                <a:latin typeface="Malgun Gothic" pitchFamily="34" charset="0"/>
+                <a:ea typeface="Malgun Gothic" pitchFamily="34" charset="-122"/>
+                <a:cs typeface="Malgun Gothic" pitchFamily="34" charset="-120"/>
+              </a:rPr>
+              <a:t>한 줄 요약 : 비슷한 설계는 비슷한 결과(②) → 해석 결과의 가중평균으로 예측(③) + 신뢰도 제공(④) · 설정은 데이터가 결정(⑤)</a:t>
+            </a:r>
+            <a:endParaRPr lang="en-US" sz="950" dirty="0"/>
+          </a:p>
+        </p:txBody>
+      </p:sp>
+    </p:spTree>
+  </p:cSld>
+  <p:clrMapOvr>
+    <a:masterClrMapping/>
+  </p:clrMapOvr>
+</p:sld>
+</file>
+
 <file path=ppt/theme/theme1.xml><?xml version="1.0" encoding="utf-8"?>
 <a:theme xmlns:a="http://schemas.openxmlformats.org/drawingml/2006/main" name="Office Theme">
   <a:themeElements>

--- a/GPR_장표.pptx
+++ b/GPR_장표.pptx
@@ -503,7 +503,7 @@
           <a:p>
             <a:r>
               <a:rPr lang="en-US" dirty="0"/>
-              <a:t>가우시안 프로세스 회귀는 해석 결과를 매끄러운 함수와 작은 수치 오차의 합으로 봅니다. 두 설계가 얼마나 비슷한지는 Matern 커널로 계산하는데, 변수마다 길이척도를 따로 두어 민감한 변수는 짧게, 둔감한 변수는 길게 학습합니다. 이 하이퍼파라미터들은 확보한 해석 데이터가 나올 가능성, 즉 우도가 최대가 되도록 자동으로 정합니다. 예측값은 해석한 80점 결과의 가중평균이고 가까운 점일수록 가중치가 크며, 불확실성은 해석점에서 멀어질수록 커집니다.</a:t>
+              <a:t>가우시안 프로세스 회귀는 해석 결과가 설계에 따라 매끄럽게 변한다고 봅니다. 두 설계가 얼마나 비슷한지는 Matern 커널로 계산하는데, 변수마다 길이척도를 따로 두어 민감한 변수는 짧게, 둔감한 변수는 길게 학습합니다. 이 하이퍼파라미터들은 확보한 해석 데이터가 나올 가능성, 즉 우도가 최대가 되도록 자동으로 정합니다. 예측값은 해석한 80점 결과의 가중평균이고 가까운 점일수록 가중치가 크며, 불확실성은 해석점에서 멀어질수록 커집니다.</a:t>
             </a:r>
             <a:endParaRPr lang="en-US" dirty="0"/>
           </a:p>
@@ -2975,7 +2975,7 @@
         <p:spPr>
           <a:xfrm>
             <a:off x="6647688" y="3326587"/>
-            <a:ext cx="4846320" cy="365760"/>
+            <a:ext cx="4846320" cy="237744"/>
           </a:xfrm>
           <a:prstGeom prst="rect">
             <a:avLst/>
@@ -3002,27 +3002,7 @@
                 <a:ea typeface="Malgun Gothic" pitchFamily="34" charset="-122"/>
                 <a:cs typeface="Malgun Gothic" pitchFamily="34" charset="-120"/>
               </a:rPr>
-              <a:t>y: 해석 결과  ·  f: 설계에 따라 매끄럽게 변하는 성능  ·  ε: 작은 수치 오차</a:t>
-            </a:r>
-            <a:endParaRPr lang="en-US" sz="880" dirty="0"/>
-          </a:p>
-          <a:p>
-            <a:pPr indent="0" marL="0">
-              <a:lnSpc>
-                <a:spcPct val="115000"/>
-              </a:lnSpc>
-              <a:buNone/>
-            </a:pPr>
-            <a:r>
-              <a:rPr lang="en-US" sz="880" dirty="0">
-                <a:solidFill>
-                  <a:srgbClr val="6B7A8F"/>
-                </a:solidFill>
-                <a:latin typeface="Malgun Gothic" pitchFamily="34" charset="0"/>
-                <a:ea typeface="Malgun Gothic" pitchFamily="34" charset="-122"/>
-                <a:cs typeface="Malgun Gothic" pitchFamily="34" charset="-120"/>
-              </a:rPr>
-              <a:t>σ_n²: 오차의 크기 (메시 · 수렴 차이로 생기는 흔들림), 학습으로 자동 결정</a:t>
+              <a:t>y: 해석 결과  ·  f: 설계에 따라 매끄럽게 변하는 성능  ·  ε: 미소 오차</a:t>
             </a:r>
             <a:endParaRPr lang="en-US" sz="880" dirty="0"/>
           </a:p>
@@ -3036,7 +3016,7 @@
         </p:nvSpPr>
         <p:spPr>
           <a:xfrm>
-            <a:off x="6647688" y="3785616"/>
+            <a:off x="6647688" y="3657600"/>
             <a:ext cx="4846320" cy="237744"/>
           </a:xfrm>
           <a:prstGeom prst="rect">
@@ -3083,8 +3063,8 @@
         </p:blipFill>
         <p:spPr>
           <a:xfrm>
-            <a:off x="6739128" y="4023360"/>
-            <a:ext cx="3838651" cy="521208"/>
+            <a:off x="6739128" y="3913632"/>
+            <a:ext cx="3966606" cy="538582"/>
           </a:xfrm>
           <a:prstGeom prst="rect">
             <a:avLst/>
@@ -3099,7 +3079,7 @@
         </p:nvSpPr>
         <p:spPr>
           <a:xfrm>
-            <a:off x="6647688" y="4562856"/>
+            <a:off x="6647688" y="4479646"/>
             <a:ext cx="4846320" cy="365760"/>
           </a:xfrm>
           <a:prstGeom prst="rect">
@@ -3141,7 +3121,7 @@
         </p:nvSpPr>
         <p:spPr>
           <a:xfrm>
-            <a:off x="6647688" y="5029200"/>
+            <a:off x="6647688" y="4937760"/>
             <a:ext cx="4846320" cy="237744"/>
           </a:xfrm>
           <a:prstGeom prst="rect">
@@ -3188,7 +3168,7 @@
         </p:blipFill>
         <p:spPr>
           <a:xfrm>
-            <a:off x="6739128" y="5276088"/>
+            <a:off x="6739128" y="5193792"/>
             <a:ext cx="3877056" cy="228600"/>
           </a:xfrm>
           <a:prstGeom prst="rect">
@@ -3204,7 +3184,7 @@
         </p:nvSpPr>
         <p:spPr>
           <a:xfrm>
-            <a:off x="6647688" y="5522976"/>
+            <a:off x="6647688" y="5449824"/>
             <a:ext cx="4846320" cy="365760"/>
           </a:xfrm>
           <a:prstGeom prst="rect">
@@ -3593,7 +3573,7 @@
                 <a:ea typeface="Malgun Gothic" pitchFamily="34" charset="-122"/>
                 <a:cs typeface="Malgun Gothic" pitchFamily="34" charset="-120"/>
               </a:rPr>
-              <a:t>해석 결과는 진짜 성능에 아주 작은 오차가 섞인 것</a:t>
+              <a:t>설계가 조금 바뀌면 성능도 조금만 바뀐다</a:t>
             </a:r>
             <a:endParaRPr lang="en-US" sz="1100" dirty="0"/>
           </a:p>
@@ -3613,7 +3593,7 @@
                 <a:ea typeface="Malgun Gothic" pitchFamily="34" charset="-122"/>
                 <a:cs typeface="Malgun Gothic" pitchFamily="34" charset="-120"/>
               </a:rPr>
-              <a:t>→ 해석점을 억지로 통과하지 않는 매끄러운 곡선 → 수치 오차(σ_n²)까지 외우지 않음</a:t>
+              <a:t>→ 급격히 튀지 않는 매끄러운 곡선으로 해석점 사이를 예측</a:t>
             </a:r>
             <a:endParaRPr lang="en-US" sz="1100" dirty="0"/>
           </a:p>
